--- a/仓储管理系统-课程设计演示PPT.pptx
+++ b/仓储管理系统-课程设计演示PPT.pptx
@@ -1,21 +1,21 @@
 
 <file path=ppt/presentation.xml><?xml version="1.0" encoding="utf-8"?>
-<p:presentation xmlns:a="http://schemas.openxmlformats.org/drawingml/2006/main" xmlns:r="http://schemas.openxmlformats.org/officeDocument/2006/relationships" xmlns:p="http://schemas.openxmlformats.org/presentationml/2006/main" saveSubsetFonts="1" autoCompressPictures="0">
+<p:presentation xmlns:a="http://schemas.openxmlformats.org/drawingml/2006/main" xmlns:r="http://schemas.openxmlformats.org/officeDocument/2006/relationships" xmlns:p="http://schemas.openxmlformats.org/presentationml/2006/main" autoCompressPictures="0">
   <p:sldMasterIdLst>
     <p:sldMasterId id="2147483648" r:id="rId1"/>
   </p:sldMasterIdLst>
   <p:sldIdLst>
-    <p:sldId id="256" r:id="rId7"/>
-    <p:sldId id="257" r:id="rId8"/>
-    <p:sldId id="258" r:id="rId9"/>
-    <p:sldId id="259" r:id="rId10"/>
-    <p:sldId id="260" r:id="rId11"/>
-    <p:sldId id="261" r:id="rId12"/>
-    <p:sldId id="262" r:id="rId13"/>
-    <p:sldId id="263" r:id="rId14"/>
-    <p:sldId id="264" r:id="rId15"/>
+    <p:sldId id="256" r:id="rId3"/>
+    <p:sldId id="257" r:id="rId4"/>
+    <p:sldId id="258" r:id="rId5"/>
+    <p:sldId id="259" r:id="rId6"/>
+    <p:sldId id="260" r:id="rId7"/>
+    <p:sldId id="261" r:id="rId8"/>
+    <p:sldId id="262" r:id="rId9"/>
+    <p:sldId id="263" r:id="rId10"/>
+    <p:sldId id="264" r:id="rId11"/>
   </p:sldIdLst>
-  <p:sldSz cx="12191695" cy="6858000" type="screen4x3"/>
+  <p:sldSz cx="12191365" cy="6858000" type="screen4x3"/>
   <p:notesSz cx="6858000" cy="9144000"/>
   <p:defaultTextStyle>
     <a:defPPr>
@@ -296,7 +296,6 @@
           <a:p>
             <a:fld id="{5BCAD085-E8A6-8845-BD4E-CB4CCA059FC4}" type="datetimeFigureOut">
               <a:rPr lang="en-US" smtClean="0"/>
-              <a:t>1/27/13</a:t>
             </a:fld>
             <a:endParaRPr lang="en-US"/>
           </a:p>
@@ -338,18 +337,12 @@
           <a:p>
             <a:fld id="{C1FF6DA9-008F-8B48-92A6-B652298478BF}" type="slidenum">
               <a:rPr lang="en-US" smtClean="0"/>
-              <a:t>‹#›</a:t>
             </a:fld>
             <a:endParaRPr lang="en-US"/>
           </a:p>
         </p:txBody>
       </p:sp>
     </p:spTree>
-    <p:extLst>
-      <p:ext uri="{BB962C8B-B14F-4D97-AF65-F5344CB8AC3E}">
-        <p14:creationId xmlns:p14="http://schemas.microsoft.com/office/powerpoint/2010/main" val="3168075583"/>
-      </p:ext>
-    </p:extLst>
   </p:cSld>
   <p:clrMapOvr>
     <a:masterClrMapping/>
@@ -417,6 +410,7 @@
               <a:rPr lang="en-US" smtClean="0"/>
               <a:t>Click to edit Master text styles</a:t>
             </a:r>
+            <a:endParaRPr lang="en-US" smtClean="0"/>
           </a:p>
           <a:p>
             <a:pPr lvl="1"/>
@@ -424,6 +418,7 @@
               <a:rPr lang="en-US" smtClean="0"/>
               <a:t>Second level</a:t>
             </a:r>
+            <a:endParaRPr lang="en-US" smtClean="0"/>
           </a:p>
           <a:p>
             <a:pPr lvl="2"/>
@@ -431,6 +426,7 @@
               <a:rPr lang="en-US" smtClean="0"/>
               <a:t>Third level</a:t>
             </a:r>
+            <a:endParaRPr lang="en-US" smtClean="0"/>
           </a:p>
           <a:p>
             <a:pPr lvl="3"/>
@@ -438,6 +434,7 @@
               <a:rPr lang="en-US" smtClean="0"/>
               <a:t>Fourth level</a:t>
             </a:r>
+            <a:endParaRPr lang="en-US" smtClean="0"/>
           </a:p>
           <a:p>
             <a:pPr lvl="4"/>
@@ -466,7 +463,6 @@
           <a:p>
             <a:fld id="{5BCAD085-E8A6-8845-BD4E-CB4CCA059FC4}" type="datetimeFigureOut">
               <a:rPr lang="en-US" smtClean="0"/>
-              <a:t>1/27/13</a:t>
             </a:fld>
             <a:endParaRPr lang="en-US"/>
           </a:p>
@@ -508,18 +504,12 @@
           <a:p>
             <a:fld id="{C1FF6DA9-008F-8B48-92A6-B652298478BF}" type="slidenum">
               <a:rPr lang="en-US" smtClean="0"/>
-              <a:t>‹#›</a:t>
             </a:fld>
             <a:endParaRPr lang="en-US"/>
           </a:p>
         </p:txBody>
       </p:sp>
     </p:spTree>
-    <p:extLst>
-      <p:ext uri="{BB962C8B-B14F-4D97-AF65-F5344CB8AC3E}">
-        <p14:creationId xmlns:p14="http://schemas.microsoft.com/office/powerpoint/2010/main" val="2910927964"/>
-      </p:ext>
-    </p:extLst>
   </p:cSld>
   <p:clrMapOvr>
     <a:masterClrMapping/>
@@ -597,6 +587,7 @@
               <a:rPr lang="en-US" smtClean="0"/>
               <a:t>Click to edit Master text styles</a:t>
             </a:r>
+            <a:endParaRPr lang="en-US" smtClean="0"/>
           </a:p>
           <a:p>
             <a:pPr lvl="1"/>
@@ -604,6 +595,7 @@
               <a:rPr lang="en-US" smtClean="0"/>
               <a:t>Second level</a:t>
             </a:r>
+            <a:endParaRPr lang="en-US" smtClean="0"/>
           </a:p>
           <a:p>
             <a:pPr lvl="2"/>
@@ -611,6 +603,7 @@
               <a:rPr lang="en-US" smtClean="0"/>
               <a:t>Third level</a:t>
             </a:r>
+            <a:endParaRPr lang="en-US" smtClean="0"/>
           </a:p>
           <a:p>
             <a:pPr lvl="3"/>
@@ -618,6 +611,7 @@
               <a:rPr lang="en-US" smtClean="0"/>
               <a:t>Fourth level</a:t>
             </a:r>
+            <a:endParaRPr lang="en-US" smtClean="0"/>
           </a:p>
           <a:p>
             <a:pPr lvl="4"/>
@@ -646,7 +640,6 @@
           <a:p>
             <a:fld id="{5BCAD085-E8A6-8845-BD4E-CB4CCA059FC4}" type="datetimeFigureOut">
               <a:rPr lang="en-US" smtClean="0"/>
-              <a:t>1/27/13</a:t>
             </a:fld>
             <a:endParaRPr lang="en-US"/>
           </a:p>
@@ -688,18 +681,12 @@
           <a:p>
             <a:fld id="{C1FF6DA9-008F-8B48-92A6-B652298478BF}" type="slidenum">
               <a:rPr lang="en-US" smtClean="0"/>
-              <a:t>‹#›</a:t>
             </a:fld>
             <a:endParaRPr lang="en-US"/>
           </a:p>
         </p:txBody>
       </p:sp>
     </p:spTree>
-    <p:extLst>
-      <p:ext uri="{BB962C8B-B14F-4D97-AF65-F5344CB8AC3E}">
-        <p14:creationId xmlns:p14="http://schemas.microsoft.com/office/powerpoint/2010/main" val="3612223792"/>
-      </p:ext>
-    </p:extLst>
   </p:cSld>
   <p:clrMapOvr>
     <a:masterClrMapping/>
@@ -767,6 +754,7 @@
               <a:rPr lang="en-US" smtClean="0"/>
               <a:t>Click to edit Master text styles</a:t>
             </a:r>
+            <a:endParaRPr lang="en-US" smtClean="0"/>
           </a:p>
           <a:p>
             <a:pPr lvl="1"/>
@@ -774,6 +762,7 @@
               <a:rPr lang="en-US" smtClean="0"/>
               <a:t>Second level</a:t>
             </a:r>
+            <a:endParaRPr lang="en-US" smtClean="0"/>
           </a:p>
           <a:p>
             <a:pPr lvl="2"/>
@@ -781,6 +770,7 @@
               <a:rPr lang="en-US" smtClean="0"/>
               <a:t>Third level</a:t>
             </a:r>
+            <a:endParaRPr lang="en-US" smtClean="0"/>
           </a:p>
           <a:p>
             <a:pPr lvl="3"/>
@@ -788,6 +778,7 @@
               <a:rPr lang="en-US" smtClean="0"/>
               <a:t>Fourth level</a:t>
             </a:r>
+            <a:endParaRPr lang="en-US" smtClean="0"/>
           </a:p>
           <a:p>
             <a:pPr lvl="4"/>
@@ -816,7 +807,6 @@
           <a:p>
             <a:fld id="{5BCAD085-E8A6-8845-BD4E-CB4CCA059FC4}" type="datetimeFigureOut">
               <a:rPr lang="en-US" smtClean="0"/>
-              <a:t>1/27/13</a:t>
             </a:fld>
             <a:endParaRPr lang="en-US"/>
           </a:p>
@@ -858,18 +848,12 @@
           <a:p>
             <a:fld id="{C1FF6DA9-008F-8B48-92A6-B652298478BF}" type="slidenum">
               <a:rPr lang="en-US" smtClean="0"/>
-              <a:t>‹#›</a:t>
             </a:fld>
             <a:endParaRPr lang="en-US"/>
           </a:p>
         </p:txBody>
       </p:sp>
     </p:spTree>
-    <p:extLst>
-      <p:ext uri="{BB962C8B-B14F-4D97-AF65-F5344CB8AC3E}">
-        <p14:creationId xmlns:p14="http://schemas.microsoft.com/office/powerpoint/2010/main" val="2614314258"/>
-      </p:ext>
-    </p:extLst>
   </p:cSld>
   <p:clrMapOvr>
     <a:masterClrMapping/>
@@ -1042,6 +1026,7 @@
               <a:rPr lang="en-US" smtClean="0"/>
               <a:t>Click to edit Master text styles</a:t>
             </a:r>
+            <a:endParaRPr lang="en-US" smtClean="0"/>
           </a:p>
         </p:txBody>
       </p:sp>
@@ -1062,7 +1047,6 @@
           <a:p>
             <a:fld id="{5BCAD085-E8A6-8845-BD4E-CB4CCA059FC4}" type="datetimeFigureOut">
               <a:rPr lang="en-US" smtClean="0"/>
-              <a:t>1/27/13</a:t>
             </a:fld>
             <a:endParaRPr lang="en-US"/>
           </a:p>
@@ -1104,18 +1088,12 @@
           <a:p>
             <a:fld id="{C1FF6DA9-008F-8B48-92A6-B652298478BF}" type="slidenum">
               <a:rPr lang="en-US" smtClean="0"/>
-              <a:t>‹#›</a:t>
             </a:fld>
             <a:endParaRPr lang="en-US"/>
           </a:p>
         </p:txBody>
       </p:sp>
     </p:spTree>
-    <p:extLst>
-      <p:ext uri="{BB962C8B-B14F-4D97-AF65-F5344CB8AC3E}">
-        <p14:creationId xmlns:p14="http://schemas.microsoft.com/office/powerpoint/2010/main" val="960648375"/>
-      </p:ext>
-    </p:extLst>
   </p:cSld>
   <p:clrMapOvr>
     <a:masterClrMapping/>
@@ -1216,6 +1194,7 @@
               <a:rPr lang="en-US" smtClean="0"/>
               <a:t>Click to edit Master text styles</a:t>
             </a:r>
+            <a:endParaRPr lang="en-US" smtClean="0"/>
           </a:p>
           <a:p>
             <a:pPr lvl="1"/>
@@ -1223,6 +1202,7 @@
               <a:rPr lang="en-US" smtClean="0"/>
               <a:t>Second level</a:t>
             </a:r>
+            <a:endParaRPr lang="en-US" smtClean="0"/>
           </a:p>
           <a:p>
             <a:pPr lvl="2"/>
@@ -1230,6 +1210,7 @@
               <a:rPr lang="en-US" smtClean="0"/>
               <a:t>Third level</a:t>
             </a:r>
+            <a:endParaRPr lang="en-US" smtClean="0"/>
           </a:p>
           <a:p>
             <a:pPr lvl="3"/>
@@ -1237,6 +1218,7 @@
               <a:rPr lang="en-US" smtClean="0"/>
               <a:t>Fourth level</a:t>
             </a:r>
+            <a:endParaRPr lang="en-US" smtClean="0"/>
           </a:p>
           <a:p>
             <a:pPr lvl="4"/>
@@ -1301,6 +1283,7 @@
               <a:rPr lang="en-US" smtClean="0"/>
               <a:t>Click to edit Master text styles</a:t>
             </a:r>
+            <a:endParaRPr lang="en-US" smtClean="0"/>
           </a:p>
           <a:p>
             <a:pPr lvl="1"/>
@@ -1308,6 +1291,7 @@
               <a:rPr lang="en-US" smtClean="0"/>
               <a:t>Second level</a:t>
             </a:r>
+            <a:endParaRPr lang="en-US" smtClean="0"/>
           </a:p>
           <a:p>
             <a:pPr lvl="2"/>
@@ -1315,6 +1299,7 @@
               <a:rPr lang="en-US" smtClean="0"/>
               <a:t>Third level</a:t>
             </a:r>
+            <a:endParaRPr lang="en-US" smtClean="0"/>
           </a:p>
           <a:p>
             <a:pPr lvl="3"/>
@@ -1322,6 +1307,7 @@
               <a:rPr lang="en-US" smtClean="0"/>
               <a:t>Fourth level</a:t>
             </a:r>
+            <a:endParaRPr lang="en-US" smtClean="0"/>
           </a:p>
           <a:p>
             <a:pPr lvl="4"/>
@@ -1350,7 +1336,6 @@
           <a:p>
             <a:fld id="{5BCAD085-E8A6-8845-BD4E-CB4CCA059FC4}" type="datetimeFigureOut">
               <a:rPr lang="en-US" smtClean="0"/>
-              <a:t>1/27/13</a:t>
             </a:fld>
             <a:endParaRPr lang="en-US"/>
           </a:p>
@@ -1392,18 +1377,12 @@
           <a:p>
             <a:fld id="{C1FF6DA9-008F-8B48-92A6-B652298478BF}" type="slidenum">
               <a:rPr lang="en-US" smtClean="0"/>
-              <a:t>‹#›</a:t>
             </a:fld>
             <a:endParaRPr lang="en-US"/>
           </a:p>
         </p:txBody>
       </p:sp>
     </p:spTree>
-    <p:extLst>
-      <p:ext uri="{BB962C8B-B14F-4D97-AF65-F5344CB8AC3E}">
-        <p14:creationId xmlns:p14="http://schemas.microsoft.com/office/powerpoint/2010/main" val="2782244947"/>
-      </p:ext>
-    </p:extLst>
   </p:cSld>
   <p:clrMapOvr>
     <a:masterClrMapping/>
@@ -1517,6 +1496,7 @@
               <a:rPr lang="en-US" smtClean="0"/>
               <a:t>Click to edit Master text styles</a:t>
             </a:r>
+            <a:endParaRPr lang="en-US" smtClean="0"/>
           </a:p>
         </p:txBody>
       </p:sp>
@@ -1573,6 +1553,7 @@
               <a:rPr lang="en-US" smtClean="0"/>
               <a:t>Click to edit Master text styles</a:t>
             </a:r>
+            <a:endParaRPr lang="en-US" smtClean="0"/>
           </a:p>
           <a:p>
             <a:pPr lvl="1"/>
@@ -1580,6 +1561,7 @@
               <a:rPr lang="en-US" smtClean="0"/>
               <a:t>Second level</a:t>
             </a:r>
+            <a:endParaRPr lang="en-US" smtClean="0"/>
           </a:p>
           <a:p>
             <a:pPr lvl="2"/>
@@ -1587,6 +1569,7 @@
               <a:rPr lang="en-US" smtClean="0"/>
               <a:t>Third level</a:t>
             </a:r>
+            <a:endParaRPr lang="en-US" smtClean="0"/>
           </a:p>
           <a:p>
             <a:pPr lvl="3"/>
@@ -1594,6 +1577,7 @@
               <a:rPr lang="en-US" smtClean="0"/>
               <a:t>Fourth level</a:t>
             </a:r>
+            <a:endParaRPr lang="en-US" smtClean="0"/>
           </a:p>
           <a:p>
             <a:pPr lvl="4"/>
@@ -1667,6 +1651,7 @@
               <a:rPr lang="en-US" smtClean="0"/>
               <a:t>Click to edit Master text styles</a:t>
             </a:r>
+            <a:endParaRPr lang="en-US" smtClean="0"/>
           </a:p>
         </p:txBody>
       </p:sp>
@@ -1723,6 +1708,7 @@
               <a:rPr lang="en-US" smtClean="0"/>
               <a:t>Click to edit Master text styles</a:t>
             </a:r>
+            <a:endParaRPr lang="en-US" smtClean="0"/>
           </a:p>
           <a:p>
             <a:pPr lvl="1"/>
@@ -1730,6 +1716,7 @@
               <a:rPr lang="en-US" smtClean="0"/>
               <a:t>Second level</a:t>
             </a:r>
+            <a:endParaRPr lang="en-US" smtClean="0"/>
           </a:p>
           <a:p>
             <a:pPr lvl="2"/>
@@ -1737,6 +1724,7 @@
               <a:rPr lang="en-US" smtClean="0"/>
               <a:t>Third level</a:t>
             </a:r>
+            <a:endParaRPr lang="en-US" smtClean="0"/>
           </a:p>
           <a:p>
             <a:pPr lvl="3"/>
@@ -1744,6 +1732,7 @@
               <a:rPr lang="en-US" smtClean="0"/>
               <a:t>Fourth level</a:t>
             </a:r>
+            <a:endParaRPr lang="en-US" smtClean="0"/>
           </a:p>
           <a:p>
             <a:pPr lvl="4"/>
@@ -1772,7 +1761,6 @@
           <a:p>
             <a:fld id="{5BCAD085-E8A6-8845-BD4E-CB4CCA059FC4}" type="datetimeFigureOut">
               <a:rPr lang="en-US" smtClean="0"/>
-              <a:t>1/27/13</a:t>
             </a:fld>
             <a:endParaRPr lang="en-US"/>
           </a:p>
@@ -1814,18 +1802,12 @@
           <a:p>
             <a:fld id="{C1FF6DA9-008F-8B48-92A6-B652298478BF}" type="slidenum">
               <a:rPr lang="en-US" smtClean="0"/>
-              <a:t>‹#›</a:t>
             </a:fld>
             <a:endParaRPr lang="en-US"/>
           </a:p>
         </p:txBody>
       </p:sp>
     </p:spTree>
-    <p:extLst>
-      <p:ext uri="{BB962C8B-B14F-4D97-AF65-F5344CB8AC3E}">
-        <p14:creationId xmlns:p14="http://schemas.microsoft.com/office/powerpoint/2010/main" val="990158736"/>
-      </p:ext>
-    </p:extLst>
   </p:cSld>
   <p:clrMapOvr>
     <a:masterClrMapping/>
@@ -1890,7 +1872,6 @@
           <a:p>
             <a:fld id="{5BCAD085-E8A6-8845-BD4E-CB4CCA059FC4}" type="datetimeFigureOut">
               <a:rPr lang="en-US" smtClean="0"/>
-              <a:t>1/27/13</a:t>
             </a:fld>
             <a:endParaRPr lang="en-US"/>
           </a:p>
@@ -1932,18 +1913,12 @@
           <a:p>
             <a:fld id="{C1FF6DA9-008F-8B48-92A6-B652298478BF}" type="slidenum">
               <a:rPr lang="en-US" smtClean="0"/>
-              <a:t>‹#›</a:t>
             </a:fld>
             <a:endParaRPr lang="en-US"/>
           </a:p>
         </p:txBody>
       </p:sp>
     </p:spTree>
-    <p:extLst>
-      <p:ext uri="{BB962C8B-B14F-4D97-AF65-F5344CB8AC3E}">
-        <p14:creationId xmlns:p14="http://schemas.microsoft.com/office/powerpoint/2010/main" val="727027711"/>
-      </p:ext>
-    </p:extLst>
   </p:cSld>
   <p:clrMapOvr>
     <a:masterClrMapping/>
@@ -1985,7 +1960,6 @@
           <a:p>
             <a:fld id="{5BCAD085-E8A6-8845-BD4E-CB4CCA059FC4}" type="datetimeFigureOut">
               <a:rPr lang="en-US" smtClean="0"/>
-              <a:t>1/27/13</a:t>
             </a:fld>
             <a:endParaRPr lang="en-US"/>
           </a:p>
@@ -2027,18 +2001,12 @@
           <a:p>
             <a:fld id="{C1FF6DA9-008F-8B48-92A6-B652298478BF}" type="slidenum">
               <a:rPr lang="en-US" smtClean="0"/>
-              <a:t>‹#›</a:t>
             </a:fld>
             <a:endParaRPr lang="en-US"/>
           </a:p>
         </p:txBody>
       </p:sp>
     </p:spTree>
-    <p:extLst>
-      <p:ext uri="{BB962C8B-B14F-4D97-AF65-F5344CB8AC3E}">
-        <p14:creationId xmlns:p14="http://schemas.microsoft.com/office/powerpoint/2010/main" val="1212999818"/>
-      </p:ext>
-    </p:extLst>
   </p:cSld>
   <p:clrMapOvr>
     <a:masterClrMapping/>
@@ -2148,6 +2116,7 @@
               <a:rPr lang="en-US" smtClean="0"/>
               <a:t>Click to edit Master text styles</a:t>
             </a:r>
+            <a:endParaRPr lang="en-US" smtClean="0"/>
           </a:p>
           <a:p>
             <a:pPr lvl="1"/>
@@ -2155,6 +2124,7 @@
               <a:rPr lang="en-US" smtClean="0"/>
               <a:t>Second level</a:t>
             </a:r>
+            <a:endParaRPr lang="en-US" smtClean="0"/>
           </a:p>
           <a:p>
             <a:pPr lvl="2"/>
@@ -2162,6 +2132,7 @@
               <a:rPr lang="en-US" smtClean="0"/>
               <a:t>Third level</a:t>
             </a:r>
+            <a:endParaRPr lang="en-US" smtClean="0"/>
           </a:p>
           <a:p>
             <a:pPr lvl="3"/>
@@ -2169,6 +2140,7 @@
               <a:rPr lang="en-US" smtClean="0"/>
               <a:t>Fourth level</a:t>
             </a:r>
+            <a:endParaRPr lang="en-US" smtClean="0"/>
           </a:p>
           <a:p>
             <a:pPr lvl="4"/>
@@ -2242,6 +2214,7 @@
               <a:rPr lang="en-US" smtClean="0"/>
               <a:t>Click to edit Master text styles</a:t>
             </a:r>
+            <a:endParaRPr lang="en-US" smtClean="0"/>
           </a:p>
         </p:txBody>
       </p:sp>
@@ -2262,7 +2235,6 @@
           <a:p>
             <a:fld id="{5BCAD085-E8A6-8845-BD4E-CB4CCA059FC4}" type="datetimeFigureOut">
               <a:rPr lang="en-US" smtClean="0"/>
-              <a:t>1/27/13</a:t>
             </a:fld>
             <a:endParaRPr lang="en-US"/>
           </a:p>
@@ -2304,18 +2276,12 @@
           <a:p>
             <a:fld id="{C1FF6DA9-008F-8B48-92A6-B652298478BF}" type="slidenum">
               <a:rPr lang="en-US" smtClean="0"/>
-              <a:t>‹#›</a:t>
             </a:fld>
             <a:endParaRPr lang="en-US"/>
           </a:p>
         </p:txBody>
       </p:sp>
     </p:spTree>
-    <p:extLst>
-      <p:ext uri="{BB962C8B-B14F-4D97-AF65-F5344CB8AC3E}">
-        <p14:creationId xmlns:p14="http://schemas.microsoft.com/office/powerpoint/2010/main" val="1840726560"/>
-      </p:ext>
-    </p:extLst>
   </p:cSld>
   <p:clrMapOvr>
     <a:masterClrMapping/>
@@ -2495,6 +2461,7 @@
               <a:rPr lang="en-US" smtClean="0"/>
               <a:t>Click to edit Master text styles</a:t>
             </a:r>
+            <a:endParaRPr lang="en-US" smtClean="0"/>
           </a:p>
         </p:txBody>
       </p:sp>
@@ -2515,7 +2482,6 @@
           <a:p>
             <a:fld id="{5BCAD085-E8A6-8845-BD4E-CB4CCA059FC4}" type="datetimeFigureOut">
               <a:rPr lang="en-US" smtClean="0"/>
-              <a:t>1/27/13</a:t>
             </a:fld>
             <a:endParaRPr lang="en-US"/>
           </a:p>
@@ -2557,18 +2523,12 @@
           <a:p>
             <a:fld id="{C1FF6DA9-008F-8B48-92A6-B652298478BF}" type="slidenum">
               <a:rPr lang="en-US" smtClean="0"/>
-              <a:t>‹#›</a:t>
             </a:fld>
             <a:endParaRPr lang="en-US"/>
           </a:p>
         </p:txBody>
       </p:sp>
     </p:spTree>
-    <p:extLst>
-      <p:ext uri="{BB962C8B-B14F-4D97-AF65-F5344CB8AC3E}">
-        <p14:creationId xmlns:p14="http://schemas.microsoft.com/office/powerpoint/2010/main" val="3889236939"/>
-      </p:ext>
-    </p:extLst>
   </p:cSld>
   <p:clrMapOvr>
     <a:masterClrMapping/>
@@ -2661,6 +2621,7 @@
               <a:rPr lang="en-US" smtClean="0"/>
               <a:t>Click to edit Master text styles</a:t>
             </a:r>
+            <a:endParaRPr lang="en-US" smtClean="0"/>
           </a:p>
           <a:p>
             <a:pPr lvl="1"/>
@@ -2668,6 +2629,7 @@
               <a:rPr lang="en-US" smtClean="0"/>
               <a:t>Second level</a:t>
             </a:r>
+            <a:endParaRPr lang="en-US" smtClean="0"/>
           </a:p>
           <a:p>
             <a:pPr lvl="2"/>
@@ -2675,6 +2637,7 @@
               <a:rPr lang="en-US" smtClean="0"/>
               <a:t>Third level</a:t>
             </a:r>
+            <a:endParaRPr lang="en-US" smtClean="0"/>
           </a:p>
           <a:p>
             <a:pPr lvl="3"/>
@@ -2682,6 +2645,7 @@
               <a:rPr lang="en-US" smtClean="0"/>
               <a:t>Fourth level</a:t>
             </a:r>
+            <a:endParaRPr lang="en-US" smtClean="0"/>
           </a:p>
           <a:p>
             <a:pPr lvl="4"/>
@@ -2728,7 +2692,6 @@
           <a:p>
             <a:fld id="{5BCAD085-E8A6-8845-BD4E-CB4CCA059FC4}" type="datetimeFigureOut">
               <a:rPr lang="en-US" smtClean="0"/>
-              <a:t>1/27/13</a:t>
             </a:fld>
             <a:endParaRPr lang="en-US"/>
           </a:p>
@@ -2806,18 +2769,12 @@
           <a:p>
             <a:fld id="{C1FF6DA9-008F-8B48-92A6-B652298478BF}" type="slidenum">
               <a:rPr lang="en-US" smtClean="0"/>
-              <a:t>‹#›</a:t>
             </a:fld>
             <a:endParaRPr lang="en-US"/>
           </a:p>
         </p:txBody>
       </p:sp>
     </p:spTree>
-    <p:extLst>
-      <p:ext uri="{BB962C8B-B14F-4D97-AF65-F5344CB8AC3E}">
-        <p14:creationId xmlns:p14="http://schemas.microsoft.com/office/powerpoint/2010/main" val="2209977519"/>
-      </p:ext>
-    </p:extLst>
   </p:cSld>
   <p:clrMap bg1="lt1" tx1="dk1" bg2="lt2" tx2="dk2" accent1="accent1" accent2="accent2" accent3="accent3" accent4="accent4" accent5="accent5" accent6="accent6" hlink="hlink" folHlink="folHlink"/>
   <p:sldLayoutIdLst>
@@ -2855,7 +2812,7 @@
         <a:spcBef>
           <a:spcPct val="20000"/>
         </a:spcBef>
-        <a:buFont typeface="Arial"/>
+        <a:buFont typeface="Arial" panose="020B0604020202020204"/>
         <a:buChar char="•"/>
         <a:defRPr sz="3200" kern="1200">
           <a:solidFill>
@@ -2870,7 +2827,7 @@
         <a:spcBef>
           <a:spcPct val="20000"/>
         </a:spcBef>
-        <a:buFont typeface="Arial"/>
+        <a:buFont typeface="Arial" panose="020B0604020202020204"/>
         <a:buChar char="–"/>
         <a:defRPr sz="2800" kern="1200">
           <a:solidFill>
@@ -2885,7 +2842,7 @@
         <a:spcBef>
           <a:spcPct val="20000"/>
         </a:spcBef>
-        <a:buFont typeface="Arial"/>
+        <a:buFont typeface="Arial" panose="020B0604020202020204"/>
         <a:buChar char="•"/>
         <a:defRPr sz="2400" kern="1200">
           <a:solidFill>
@@ -2900,7 +2857,7 @@
         <a:spcBef>
           <a:spcPct val="20000"/>
         </a:spcBef>
-        <a:buFont typeface="Arial"/>
+        <a:buFont typeface="Arial" panose="020B0604020202020204"/>
         <a:buChar char="–"/>
         <a:defRPr sz="2000" kern="1200">
           <a:solidFill>
@@ -2915,7 +2872,7 @@
         <a:spcBef>
           <a:spcPct val="20000"/>
         </a:spcBef>
-        <a:buFont typeface="Arial"/>
+        <a:buFont typeface="Arial" panose="020B0604020202020204"/>
         <a:buChar char="»"/>
         <a:defRPr sz="2000" kern="1200">
           <a:solidFill>
@@ -2930,7 +2887,7 @@
         <a:spcBef>
           <a:spcPct val="20000"/>
         </a:spcBef>
-        <a:buFont typeface="Arial"/>
+        <a:buFont typeface="Arial" panose="020B0604020202020204"/>
         <a:buChar char="•"/>
         <a:defRPr sz="2000" kern="1200">
           <a:solidFill>
@@ -2945,7 +2902,7 @@
         <a:spcBef>
           <a:spcPct val="20000"/>
         </a:spcBef>
-        <a:buFont typeface="Arial"/>
+        <a:buFont typeface="Arial" panose="020B0604020202020204"/>
         <a:buChar char="•"/>
         <a:defRPr sz="2000" kern="1200">
           <a:solidFill>
@@ -2960,7 +2917,7 @@
         <a:spcBef>
           <a:spcPct val="20000"/>
         </a:spcBef>
-        <a:buFont typeface="Arial"/>
+        <a:buFont typeface="Arial" panose="020B0604020202020204"/>
         <a:buChar char="•"/>
         <a:defRPr sz="2000" kern="1200">
           <a:solidFill>
@@ -2975,7 +2932,7 @@
         <a:spcBef>
           <a:spcPct val="20000"/>
         </a:spcBef>
-        <a:buFont typeface="Arial"/>
+        <a:buFont typeface="Arial" panose="020B0604020202020204"/>
         <a:buChar char="•"/>
         <a:defRPr sz="2000" kern="1200">
           <a:solidFill>
@@ -3087,7 +3044,7 @@
 </file>
 
 <file path=ppt/slides/slide1.xml><?xml version="1.0" encoding="utf-8"?>
-<p:sld xmlns:a="http://schemas.openxmlformats.org/drawingml/2006/main" xmlns:p="http://schemas.openxmlformats.org/presentationml/2006/main" xmlns:r="http://schemas.openxmlformats.org/officeDocument/2006/relationships">
+<p:sld xmlns:a="http://schemas.openxmlformats.org/drawingml/2006/main" xmlns:r="http://schemas.openxmlformats.org/officeDocument/2006/relationships" xmlns:p="http://schemas.openxmlformats.org/presentationml/2006/main">
   <p:cSld>
     <p:spTree>
       <p:nvGrpSpPr>
@@ -3158,12 +3115,20 @@
                 <a:solidFill>
                   <a:srgbClr val="1A1A1A"/>
                 </a:solidFill>
-                <a:latin typeface="微软雅黑"/>
-                <a:ea typeface="微软雅黑"/>
-                <a:cs typeface="微软雅黑"/>
+                <a:latin typeface="微软雅黑" panose="020B0503020204020204" charset="-122"/>
+                <a:ea typeface="微软雅黑" panose="020B0503020204020204" charset="-122"/>
+                <a:cs typeface="微软雅黑" panose="020B0503020204020204" charset="-122"/>
               </a:rPr>
               <a:t>仓储管理系统</a:t>
             </a:r>
+            <a:endParaRPr sz="4600" b="1">
+              <a:solidFill>
+                <a:srgbClr val="1A1A1A"/>
+              </a:solidFill>
+              <a:latin typeface="微软雅黑" panose="020B0503020204020204" charset="-122"/>
+              <a:ea typeface="微软雅黑" panose="020B0503020204020204" charset="-122"/>
+              <a:cs typeface="微软雅黑" panose="020B0503020204020204" charset="-122"/>
+            </a:endParaRPr>
           </a:p>
         </p:txBody>
       </p:sp>
@@ -3199,12 +3164,20 @@
                 <a:solidFill>
                   <a:srgbClr val="8A8A8A"/>
                 </a:solidFill>
-                <a:latin typeface="微软雅黑"/>
-                <a:ea typeface="微软雅黑"/>
-                <a:cs typeface="微软雅黑"/>
+                <a:latin typeface="微软雅黑" panose="020B0503020204020204" charset="-122"/>
+                <a:ea typeface="微软雅黑" panose="020B0503020204020204" charset="-122"/>
+                <a:cs typeface="微软雅黑" panose="020B0503020204020204" charset="-122"/>
               </a:rPr>
               <a:t>面向对象程序设计课程设计 · 进阶项目三</a:t>
             </a:r>
+            <a:endParaRPr sz="1500" b="0">
+              <a:solidFill>
+                <a:srgbClr val="8A8A8A"/>
+              </a:solidFill>
+              <a:latin typeface="微软雅黑" panose="020B0503020204020204" charset="-122"/>
+              <a:ea typeface="微软雅黑" panose="020B0503020204020204" charset="-122"/>
+              <a:cs typeface="微软雅黑" panose="020B0503020204020204" charset="-122"/>
+            </a:endParaRPr>
           </a:p>
         </p:txBody>
       </p:sp>
@@ -3261,12 +3234,20 @@
                 <a:solidFill>
                   <a:srgbClr val="1A1A1A"/>
                 </a:solidFill>
-                <a:latin typeface="微软雅黑"/>
-                <a:ea typeface="微软雅黑"/>
-                <a:cs typeface="微软雅黑"/>
+                <a:latin typeface="微软雅黑" panose="020B0503020204020204" charset="-122"/>
+                <a:ea typeface="微软雅黑" panose="020B0503020204020204" charset="-122"/>
+                <a:cs typeface="微软雅黑" panose="020B0503020204020204" charset="-122"/>
               </a:rPr>
               <a:t>钱昊（组长） · 黄雨轩 · 马俊浩</a:t>
             </a:r>
+            <a:endParaRPr sz="1550" b="1">
+              <a:solidFill>
+                <a:srgbClr val="1A1A1A"/>
+              </a:solidFill>
+              <a:latin typeface="微软雅黑" panose="020B0503020204020204" charset="-122"/>
+              <a:ea typeface="微软雅黑" panose="020B0503020204020204" charset="-122"/>
+              <a:cs typeface="微软雅黑" panose="020B0503020204020204" charset="-122"/>
+            </a:endParaRPr>
           </a:p>
           <a:p>
             <a:pPr algn="l">
@@ -3279,12 +3260,20 @@
                 <a:solidFill>
                   <a:srgbClr val="8A8A8A"/>
                 </a:solidFill>
-                <a:latin typeface="微软雅黑"/>
-                <a:ea typeface="微软雅黑"/>
-                <a:cs typeface="微软雅黑"/>
+                <a:latin typeface="微软雅黑" panose="020B0503020204020204" charset="-122"/>
+                <a:ea typeface="微软雅黑" panose="020B0503020204020204" charset="-122"/>
+                <a:cs typeface="微软雅黑" panose="020B0503020204020204" charset="-122"/>
               </a:rPr>
               <a:t>24 计算机科学与技术（2）班</a:t>
             </a:r>
+            <a:endParaRPr sz="1300" b="0">
+              <a:solidFill>
+                <a:srgbClr val="8A8A8A"/>
+              </a:solidFill>
+              <a:latin typeface="微软雅黑" panose="020B0503020204020204" charset="-122"/>
+              <a:ea typeface="微软雅黑" panose="020B0503020204020204" charset="-122"/>
+              <a:cs typeface="微软雅黑" panose="020B0503020204020204" charset="-122"/>
+            </a:endParaRPr>
           </a:p>
         </p:txBody>
       </p:sp>
@@ -3297,7 +3286,7 @@
 </file>
 
 <file path=ppt/slides/slide2.xml><?xml version="1.0" encoding="utf-8"?>
-<p:sld xmlns:a="http://schemas.openxmlformats.org/drawingml/2006/main" xmlns:p="http://schemas.openxmlformats.org/presentationml/2006/main" xmlns:r="http://schemas.openxmlformats.org/officeDocument/2006/relationships">
+<p:sld xmlns:a="http://schemas.openxmlformats.org/drawingml/2006/main" xmlns:r="http://schemas.openxmlformats.org/officeDocument/2006/relationships" xmlns:p="http://schemas.openxmlformats.org/presentationml/2006/main">
   <p:cSld>
     <p:spTree>
       <p:nvGrpSpPr>
@@ -3338,12 +3327,20 @@
                 <a:solidFill>
                   <a:srgbClr val="1A1A1A"/>
                 </a:solidFill>
-                <a:latin typeface="微软雅黑"/>
-                <a:ea typeface="微软雅黑"/>
-                <a:cs typeface="微软雅黑"/>
+                <a:latin typeface="微软雅黑" panose="020B0503020204020204" charset="-122"/>
+                <a:ea typeface="微软雅黑" panose="020B0503020204020204" charset="-122"/>
+                <a:cs typeface="微软雅黑" panose="020B0503020204020204" charset="-122"/>
               </a:rPr>
               <a:t>功能简介</a:t>
             </a:r>
+            <a:endParaRPr sz="2500" b="1">
+              <a:solidFill>
+                <a:srgbClr val="1A1A1A"/>
+              </a:solidFill>
+              <a:latin typeface="微软雅黑" panose="020B0503020204020204" charset="-122"/>
+              <a:ea typeface="微软雅黑" panose="020B0503020204020204" charset="-122"/>
+              <a:cs typeface="微软雅黑" panose="020B0503020204020204" charset="-122"/>
+            </a:endParaRPr>
           </a:p>
         </p:txBody>
       </p:sp>
@@ -3400,12 +3397,20 @@
                 <a:solidFill>
                   <a:srgbClr val="8A8A8A"/>
                 </a:solidFill>
-                <a:latin typeface="微软雅黑"/>
-                <a:ea typeface="微软雅黑"/>
-                <a:cs typeface="微软雅黑"/>
+                <a:latin typeface="微软雅黑" panose="020B0503020204020204" charset="-122"/>
+                <a:ea typeface="微软雅黑" panose="020B0503020204020204" charset="-122"/>
+                <a:cs typeface="微软雅黑" panose="020B0503020204020204" charset="-122"/>
               </a:rPr>
               <a:t>系统功能模块划分</a:t>
             </a:r>
+            <a:endParaRPr sz="1200" b="0">
+              <a:solidFill>
+                <a:srgbClr val="8A8A8A"/>
+              </a:solidFill>
+              <a:latin typeface="微软雅黑" panose="020B0503020204020204" charset="-122"/>
+              <a:ea typeface="微软雅黑" panose="020B0503020204020204" charset="-122"/>
+              <a:cs typeface="微软雅黑" panose="020B0503020204020204" charset="-122"/>
+            </a:endParaRPr>
           </a:p>
         </p:txBody>
       </p:sp>
@@ -3471,12 +3476,20 @@
                 <a:solidFill>
                   <a:srgbClr val="1A1A1A"/>
                 </a:solidFill>
-                <a:latin typeface="微软雅黑"/>
-                <a:ea typeface="微软雅黑"/>
-                <a:cs typeface="微软雅黑"/>
+                <a:latin typeface="微软雅黑" panose="020B0503020204020204" charset="-122"/>
+                <a:ea typeface="微软雅黑" panose="020B0503020204020204" charset="-122"/>
+                <a:cs typeface="微软雅黑" panose="020B0503020204020204" charset="-122"/>
               </a:rPr>
               <a:t>仓储管理系统</a:t>
             </a:r>
+            <a:endParaRPr sz="1450" b="1">
+              <a:solidFill>
+                <a:srgbClr val="1A1A1A"/>
+              </a:solidFill>
+              <a:latin typeface="微软雅黑" panose="020B0503020204020204" charset="-122"/>
+              <a:ea typeface="微软雅黑" panose="020B0503020204020204" charset="-122"/>
+              <a:cs typeface="微软雅黑" panose="020B0503020204020204" charset="-122"/>
+            </a:endParaRPr>
           </a:p>
         </p:txBody>
       </p:sp>
@@ -3542,12 +3555,20 @@
                 <a:solidFill>
                   <a:srgbClr val="1A1A1A"/>
                 </a:solidFill>
-                <a:latin typeface="微软雅黑"/>
-                <a:ea typeface="微软雅黑"/>
-                <a:cs typeface="微软雅黑"/>
+                <a:latin typeface="微软雅黑" panose="020B0503020204020204" charset="-122"/>
+                <a:ea typeface="微软雅黑" panose="020B0503020204020204" charset="-122"/>
+                <a:cs typeface="微软雅黑" panose="020B0503020204020204" charset="-122"/>
               </a:rPr>
               <a:t>进货单管理</a:t>
             </a:r>
+            <a:endParaRPr sz="1400" b="1">
+              <a:solidFill>
+                <a:srgbClr val="1A1A1A"/>
+              </a:solidFill>
+              <a:latin typeface="微软雅黑" panose="020B0503020204020204" charset="-122"/>
+              <a:ea typeface="微软雅黑" panose="020B0503020204020204" charset="-122"/>
+              <a:cs typeface="微软雅黑" panose="020B0503020204020204" charset="-122"/>
+            </a:endParaRPr>
           </a:p>
         </p:txBody>
       </p:sp>
@@ -3583,12 +3604,20 @@
                 <a:solidFill>
                   <a:srgbClr val="1F4E79"/>
                 </a:solidFill>
-                <a:latin typeface="微软雅黑"/>
-                <a:ea typeface="微软雅黑"/>
-                <a:cs typeface="微软雅黑"/>
+                <a:latin typeface="微软雅黑" panose="020B0503020204020204" charset="-122"/>
+                <a:ea typeface="微软雅黑" panose="020B0503020204020204" charset="-122"/>
+                <a:cs typeface="微软雅黑" panose="020B0503020204020204" charset="-122"/>
               </a:rPr>
               <a:t>黄雨轩</a:t>
             </a:r>
+            <a:endParaRPr sz="1150" b="0">
+              <a:solidFill>
+                <a:srgbClr val="1F4E79"/>
+              </a:solidFill>
+              <a:latin typeface="微软雅黑" panose="020B0503020204020204" charset="-122"/>
+              <a:ea typeface="微软雅黑" panose="020B0503020204020204" charset="-122"/>
+              <a:cs typeface="微软雅黑" panose="020B0503020204020204" charset="-122"/>
+            </a:endParaRPr>
           </a:p>
         </p:txBody>
       </p:sp>
@@ -3654,12 +3683,20 @@
                 <a:solidFill>
                   <a:srgbClr val="1A1A1A"/>
                 </a:solidFill>
-                <a:latin typeface="微软雅黑"/>
-                <a:ea typeface="微软雅黑"/>
-                <a:cs typeface="微软雅黑"/>
+                <a:latin typeface="微软雅黑" panose="020B0503020204020204" charset="-122"/>
+                <a:ea typeface="微软雅黑" panose="020B0503020204020204" charset="-122"/>
+                <a:cs typeface="微软雅黑" panose="020B0503020204020204" charset="-122"/>
               </a:rPr>
               <a:t>销售单管理</a:t>
             </a:r>
+            <a:endParaRPr sz="1400" b="1">
+              <a:solidFill>
+                <a:srgbClr val="1A1A1A"/>
+              </a:solidFill>
+              <a:latin typeface="微软雅黑" panose="020B0503020204020204" charset="-122"/>
+              <a:ea typeface="微软雅黑" panose="020B0503020204020204" charset="-122"/>
+              <a:cs typeface="微软雅黑" panose="020B0503020204020204" charset="-122"/>
+            </a:endParaRPr>
           </a:p>
         </p:txBody>
       </p:sp>
@@ -3695,12 +3732,20 @@
                 <a:solidFill>
                   <a:srgbClr val="1F4E79"/>
                 </a:solidFill>
-                <a:latin typeface="微软雅黑"/>
-                <a:ea typeface="微软雅黑"/>
-                <a:cs typeface="微软雅黑"/>
+                <a:latin typeface="微软雅黑" panose="020B0503020204020204" charset="-122"/>
+                <a:ea typeface="微软雅黑" panose="020B0503020204020204" charset="-122"/>
+                <a:cs typeface="微软雅黑" panose="020B0503020204020204" charset="-122"/>
               </a:rPr>
               <a:t>马俊浩</a:t>
             </a:r>
+            <a:endParaRPr sz="1150" b="0">
+              <a:solidFill>
+                <a:srgbClr val="1F4E79"/>
+              </a:solidFill>
+              <a:latin typeface="微软雅黑" panose="020B0503020204020204" charset="-122"/>
+              <a:ea typeface="微软雅黑" panose="020B0503020204020204" charset="-122"/>
+              <a:cs typeface="微软雅黑" panose="020B0503020204020204" charset="-122"/>
+            </a:endParaRPr>
           </a:p>
         </p:txBody>
       </p:sp>
@@ -3766,12 +3811,20 @@
                 <a:solidFill>
                   <a:srgbClr val="1A1A1A"/>
                 </a:solidFill>
-                <a:latin typeface="微软雅黑"/>
-                <a:ea typeface="微软雅黑"/>
-                <a:cs typeface="微软雅黑"/>
+                <a:latin typeface="微软雅黑" panose="020B0503020204020204" charset="-122"/>
+                <a:ea typeface="微软雅黑" panose="020B0503020204020204" charset="-122"/>
+                <a:cs typeface="微软雅黑" panose="020B0503020204020204" charset="-122"/>
               </a:rPr>
               <a:t>库存盘点</a:t>
             </a:r>
+            <a:endParaRPr sz="1400" b="1">
+              <a:solidFill>
+                <a:srgbClr val="1A1A1A"/>
+              </a:solidFill>
+              <a:latin typeface="微软雅黑" panose="020B0503020204020204" charset="-122"/>
+              <a:ea typeface="微软雅黑" panose="020B0503020204020204" charset="-122"/>
+              <a:cs typeface="微软雅黑" panose="020B0503020204020204" charset="-122"/>
+            </a:endParaRPr>
           </a:p>
         </p:txBody>
       </p:sp>
@@ -3807,12 +3860,20 @@
                 <a:solidFill>
                   <a:srgbClr val="1F4E79"/>
                 </a:solidFill>
-                <a:latin typeface="微软雅黑"/>
-                <a:ea typeface="微软雅黑"/>
-                <a:cs typeface="微软雅黑"/>
+                <a:latin typeface="微软雅黑" panose="020B0503020204020204" charset="-122"/>
+                <a:ea typeface="微软雅黑" panose="020B0503020204020204" charset="-122"/>
+                <a:cs typeface="微软雅黑" panose="020B0503020204020204" charset="-122"/>
               </a:rPr>
               <a:t>马俊浩</a:t>
             </a:r>
+            <a:endParaRPr sz="1150" b="0">
+              <a:solidFill>
+                <a:srgbClr val="1F4E79"/>
+              </a:solidFill>
+              <a:latin typeface="微软雅黑" panose="020B0503020204020204" charset="-122"/>
+              <a:ea typeface="微软雅黑" panose="020B0503020204020204" charset="-122"/>
+              <a:cs typeface="微软雅黑" panose="020B0503020204020204" charset="-122"/>
+            </a:endParaRPr>
           </a:p>
         </p:txBody>
       </p:sp>
@@ -3878,12 +3939,20 @@
                 <a:solidFill>
                   <a:srgbClr val="1A1A1A"/>
                 </a:solidFill>
-                <a:latin typeface="微软雅黑"/>
-                <a:ea typeface="微软雅黑"/>
-                <a:cs typeface="微软雅黑"/>
+                <a:latin typeface="微软雅黑" panose="020B0503020204020204" charset="-122"/>
+                <a:ea typeface="微软雅黑" panose="020B0503020204020204" charset="-122"/>
+                <a:cs typeface="微软雅黑" panose="020B0503020204020204" charset="-122"/>
               </a:rPr>
               <a:t>库存统计</a:t>
             </a:r>
+            <a:endParaRPr sz="1400" b="1">
+              <a:solidFill>
+                <a:srgbClr val="1A1A1A"/>
+              </a:solidFill>
+              <a:latin typeface="微软雅黑" panose="020B0503020204020204" charset="-122"/>
+              <a:ea typeface="微软雅黑" panose="020B0503020204020204" charset="-122"/>
+              <a:cs typeface="微软雅黑" panose="020B0503020204020204" charset="-122"/>
+            </a:endParaRPr>
           </a:p>
         </p:txBody>
       </p:sp>
@@ -3919,12 +3988,20 @@
                 <a:solidFill>
                   <a:srgbClr val="1F4E79"/>
                 </a:solidFill>
-                <a:latin typeface="微软雅黑"/>
-                <a:ea typeface="微软雅黑"/>
-                <a:cs typeface="微软雅黑"/>
+                <a:latin typeface="微软雅黑" panose="020B0503020204020204" charset="-122"/>
+                <a:ea typeface="微软雅黑" panose="020B0503020204020204" charset="-122"/>
+                <a:cs typeface="微软雅黑" panose="020B0503020204020204" charset="-122"/>
               </a:rPr>
               <a:t>黄雨轩</a:t>
             </a:r>
+            <a:endParaRPr sz="1150" b="0">
+              <a:solidFill>
+                <a:srgbClr val="1F4E79"/>
+              </a:solidFill>
+              <a:latin typeface="微软雅黑" panose="020B0503020204020204" charset="-122"/>
+              <a:ea typeface="微软雅黑" panose="020B0503020204020204" charset="-122"/>
+              <a:cs typeface="微软雅黑" panose="020B0503020204020204" charset="-122"/>
+            </a:endParaRPr>
           </a:p>
         </p:txBody>
       </p:sp>
@@ -3990,12 +4067,20 @@
                 <a:solidFill>
                   <a:srgbClr val="1A1A1A"/>
                 </a:solidFill>
-                <a:latin typeface="微软雅黑"/>
-                <a:ea typeface="微软雅黑"/>
-                <a:cs typeface="微软雅黑"/>
+                <a:latin typeface="微软雅黑" panose="020B0503020204020204" charset="-122"/>
+                <a:ea typeface="微软雅黑" panose="020B0503020204020204" charset="-122"/>
+                <a:cs typeface="微软雅黑" panose="020B0503020204020204" charset="-122"/>
               </a:rPr>
               <a:t>备份与恢复</a:t>
             </a:r>
+            <a:endParaRPr sz="1400" b="1">
+              <a:solidFill>
+                <a:srgbClr val="1A1A1A"/>
+              </a:solidFill>
+              <a:latin typeface="微软雅黑" panose="020B0503020204020204" charset="-122"/>
+              <a:ea typeface="微软雅黑" panose="020B0503020204020204" charset="-122"/>
+              <a:cs typeface="微软雅黑" panose="020B0503020204020204" charset="-122"/>
+            </a:endParaRPr>
           </a:p>
         </p:txBody>
       </p:sp>
@@ -4031,12 +4116,20 @@
                 <a:solidFill>
                   <a:srgbClr val="1F4E79"/>
                 </a:solidFill>
-                <a:latin typeface="微软雅黑"/>
-                <a:ea typeface="微软雅黑"/>
-                <a:cs typeface="微软雅黑"/>
+                <a:latin typeface="微软雅黑" panose="020B0503020204020204" charset="-122"/>
+                <a:ea typeface="微软雅黑" panose="020B0503020204020204" charset="-122"/>
+                <a:cs typeface="微软雅黑" panose="020B0503020204020204" charset="-122"/>
               </a:rPr>
               <a:t>钱昊</a:t>
             </a:r>
+            <a:endParaRPr sz="1150" b="0">
+              <a:solidFill>
+                <a:srgbClr val="1F4E79"/>
+              </a:solidFill>
+              <a:latin typeface="微软雅黑" panose="020B0503020204020204" charset="-122"/>
+              <a:ea typeface="微软雅黑" panose="020B0503020204020204" charset="-122"/>
+              <a:cs typeface="微软雅黑" panose="020B0503020204020204" charset="-122"/>
+            </a:endParaRPr>
           </a:p>
         </p:txBody>
       </p:sp>
@@ -4219,12 +4312,20 @@
                 <a:solidFill>
                   <a:srgbClr val="1A1A1A"/>
                 </a:solidFill>
-                <a:latin typeface="微软雅黑"/>
-                <a:ea typeface="微软雅黑"/>
-                <a:cs typeface="微软雅黑"/>
+                <a:latin typeface="微软雅黑" panose="020B0503020204020204" charset="-122"/>
+                <a:ea typeface="微软雅黑" panose="020B0503020204020204" charset="-122"/>
+                <a:cs typeface="微软雅黑" panose="020B0503020204020204" charset="-122"/>
               </a:rPr>
               <a:t>公共支撑层（钱昊 · 组长）</a:t>
             </a:r>
+            <a:endParaRPr sz="1300" b="1">
+              <a:solidFill>
+                <a:srgbClr val="1A1A1A"/>
+              </a:solidFill>
+              <a:latin typeface="微软雅黑" panose="020B0503020204020204" charset="-122"/>
+              <a:ea typeface="微软雅黑" panose="020B0503020204020204" charset="-122"/>
+              <a:cs typeface="微软雅黑" panose="020B0503020204020204" charset="-122"/>
+            </a:endParaRPr>
           </a:p>
           <a:p>
             <a:pPr algn="l">
@@ -4237,12 +4338,20 @@
                 <a:solidFill>
                   <a:srgbClr val="444444"/>
                 </a:solidFill>
-                <a:latin typeface="微软雅黑"/>
-                <a:ea typeface="微软雅黑"/>
-                <a:cs typeface="微软雅黑"/>
+                <a:latin typeface="微软雅黑" panose="020B0503020204020204" charset="-122"/>
+                <a:ea typeface="微软雅黑" panose="020B0503020204020204" charset="-122"/>
+                <a:cs typeface="微软雅黑" panose="020B0503020204020204" charset="-122"/>
               </a:rPr>
               <a:t>数据库连接工具 DBUtil　·　商品数据层 Goods / GoodsDAO　·　主界面框架 MainFrame　·　事件监听 StockEventManager</a:t>
             </a:r>
+            <a:endParaRPr sz="1150" b="0">
+              <a:solidFill>
+                <a:srgbClr val="444444"/>
+              </a:solidFill>
+              <a:latin typeface="微软雅黑" panose="020B0503020204020204" charset="-122"/>
+              <a:ea typeface="微软雅黑" panose="020B0503020204020204" charset="-122"/>
+              <a:cs typeface="微软雅黑" panose="020B0503020204020204" charset="-122"/>
+            </a:endParaRPr>
           </a:p>
         </p:txBody>
       </p:sp>
@@ -4255,7 +4364,7 @@
 </file>
 
 <file path=ppt/slides/slide3.xml><?xml version="1.0" encoding="utf-8"?>
-<p:sld xmlns:a="http://schemas.openxmlformats.org/drawingml/2006/main" xmlns:p="http://schemas.openxmlformats.org/presentationml/2006/main" xmlns:r="http://schemas.openxmlformats.org/officeDocument/2006/relationships">
+<p:sld xmlns:a="http://schemas.openxmlformats.org/drawingml/2006/main" xmlns:r="http://schemas.openxmlformats.org/officeDocument/2006/relationships" xmlns:p="http://schemas.openxmlformats.org/presentationml/2006/main">
   <p:cSld>
     <p:spTree>
       <p:nvGrpSpPr>
@@ -4296,12 +4405,20 @@
                 <a:solidFill>
                   <a:srgbClr val="1A1A1A"/>
                 </a:solidFill>
-                <a:latin typeface="微软雅黑"/>
-                <a:ea typeface="微软雅黑"/>
-                <a:cs typeface="微软雅黑"/>
+                <a:latin typeface="微软雅黑" panose="020B0503020204020204" charset="-122"/>
+                <a:ea typeface="微软雅黑" panose="020B0503020204020204" charset="-122"/>
+                <a:cs typeface="微软雅黑" panose="020B0503020204020204" charset="-122"/>
               </a:rPr>
               <a:t>设计简介</a:t>
             </a:r>
+            <a:endParaRPr sz="2500" b="1">
+              <a:solidFill>
+                <a:srgbClr val="1A1A1A"/>
+              </a:solidFill>
+              <a:latin typeface="微软雅黑" panose="020B0503020204020204" charset="-122"/>
+              <a:ea typeface="微软雅黑" panose="020B0503020204020204" charset="-122"/>
+              <a:cs typeface="微软雅黑" panose="020B0503020204020204" charset="-122"/>
+            </a:endParaRPr>
           </a:p>
         </p:txBody>
       </p:sp>
@@ -4358,12 +4475,20 @@
                 <a:solidFill>
                   <a:srgbClr val="8A8A8A"/>
                 </a:solidFill>
-                <a:latin typeface="微软雅黑"/>
-                <a:ea typeface="微软雅黑"/>
-                <a:cs typeface="微软雅黑"/>
+                <a:latin typeface="微软雅黑" panose="020B0503020204020204" charset="-122"/>
+                <a:ea typeface="微软雅黑" panose="020B0503020204020204" charset="-122"/>
+                <a:cs typeface="微软雅黑" panose="020B0503020204020204" charset="-122"/>
               </a:rPr>
               <a:t>系统分层架构</a:t>
             </a:r>
+            <a:endParaRPr sz="1200" b="0">
+              <a:solidFill>
+                <a:srgbClr val="8A8A8A"/>
+              </a:solidFill>
+              <a:latin typeface="微软雅黑" panose="020B0503020204020204" charset="-122"/>
+              <a:ea typeface="微软雅黑" panose="020B0503020204020204" charset="-122"/>
+              <a:cs typeface="微软雅黑" panose="020B0503020204020204" charset="-122"/>
+            </a:endParaRPr>
           </a:p>
         </p:txBody>
       </p:sp>
@@ -4399,12 +4524,20 @@
                 <a:solidFill>
                   <a:srgbClr val="1A1A1A"/>
                 </a:solidFill>
-                <a:latin typeface="微软雅黑"/>
-                <a:ea typeface="微软雅黑"/>
-                <a:cs typeface="微软雅黑"/>
+                <a:latin typeface="微软雅黑" panose="020B0503020204020204" charset="-122"/>
+                <a:ea typeface="微软雅黑" panose="020B0503020204020204" charset="-122"/>
+                <a:cs typeface="微软雅黑" panose="020B0503020204020204" charset="-122"/>
               </a:rPr>
               <a:t>界面层  (Swing)</a:t>
             </a:r>
+            <a:endParaRPr sz="1400" b="1">
+              <a:solidFill>
+                <a:srgbClr val="1A1A1A"/>
+              </a:solidFill>
+              <a:latin typeface="微软雅黑" panose="020B0503020204020204" charset="-122"/>
+              <a:ea typeface="微软雅黑" panose="020B0503020204020204" charset="-122"/>
+              <a:cs typeface="微软雅黑" panose="020B0503020204020204" charset="-122"/>
+            </a:endParaRPr>
           </a:p>
         </p:txBody>
       </p:sp>
@@ -4461,12 +4594,20 @@
                 <a:solidFill>
                   <a:srgbClr val="444444"/>
                 </a:solidFill>
-                <a:latin typeface="微软雅黑"/>
-                <a:ea typeface="微软雅黑"/>
-                <a:cs typeface="微软雅黑"/>
+                <a:latin typeface="微软雅黑" panose="020B0503020204020204" charset="-122"/>
+                <a:ea typeface="微软雅黑" panose="020B0503020204020204" charset="-122"/>
+                <a:cs typeface="微软雅黑" panose="020B0503020204020204" charset="-122"/>
               </a:rPr>
               <a:t>MainFrame 主框架　PurchaseDialog / SaleDialog 单据录入　StockCheckFrame 盘点　StatDialog 统计　DbBackupFrame 备份恢复</a:t>
             </a:r>
+            <a:endParaRPr sz="1150" b="0">
+              <a:solidFill>
+                <a:srgbClr val="444444"/>
+              </a:solidFill>
+              <a:latin typeface="微软雅黑" panose="020B0503020204020204" charset="-122"/>
+              <a:ea typeface="微软雅黑" panose="020B0503020204020204" charset="-122"/>
+              <a:cs typeface="微软雅黑" panose="020B0503020204020204" charset="-122"/>
+            </a:endParaRPr>
           </a:p>
         </p:txBody>
       </p:sp>
@@ -4502,12 +4643,20 @@
                 <a:solidFill>
                   <a:srgbClr val="1A1A1A"/>
                 </a:solidFill>
-                <a:latin typeface="微软雅黑"/>
-                <a:ea typeface="微软雅黑"/>
-                <a:cs typeface="微软雅黑"/>
+                <a:latin typeface="微软雅黑" panose="020B0503020204020204" charset="-122"/>
+                <a:ea typeface="微软雅黑" panose="020B0503020204020204" charset="-122"/>
+                <a:cs typeface="微软雅黑" panose="020B0503020204020204" charset="-122"/>
               </a:rPr>
               <a:t>业务与数据访问层  (DAO)</a:t>
             </a:r>
+            <a:endParaRPr sz="1400" b="1">
+              <a:solidFill>
+                <a:srgbClr val="1A1A1A"/>
+              </a:solidFill>
+              <a:latin typeface="微软雅黑" panose="020B0503020204020204" charset="-122"/>
+              <a:ea typeface="微软雅黑" panose="020B0503020204020204" charset="-122"/>
+              <a:cs typeface="微软雅黑" panose="020B0503020204020204" charset="-122"/>
+            </a:endParaRPr>
           </a:p>
         </p:txBody>
       </p:sp>
@@ -4564,12 +4713,20 @@
                 <a:solidFill>
                   <a:srgbClr val="444444"/>
                 </a:solidFill>
-                <a:latin typeface="微软雅黑"/>
-                <a:ea typeface="微软雅黑"/>
-                <a:cs typeface="微软雅黑"/>
+                <a:latin typeface="微软雅黑" panose="020B0503020204020204" charset="-122"/>
+                <a:ea typeface="微软雅黑" panose="020B0503020204020204" charset="-122"/>
+                <a:cs typeface="微软雅黑" panose="020B0503020204020204" charset="-122"/>
               </a:rPr>
               <a:t>PurchaseOrderDAO / PurchaseDAO　SaleDAO / SaleOrderDAO　GoodsDAO　StockStatDAO</a:t>
             </a:r>
+            <a:endParaRPr sz="1150" b="0">
+              <a:solidFill>
+                <a:srgbClr val="444444"/>
+              </a:solidFill>
+              <a:latin typeface="微软雅黑" panose="020B0503020204020204" charset="-122"/>
+              <a:ea typeface="微软雅黑" panose="020B0503020204020204" charset="-122"/>
+              <a:cs typeface="微软雅黑" panose="020B0503020204020204" charset="-122"/>
+            </a:endParaRPr>
           </a:p>
         </p:txBody>
       </p:sp>
@@ -4605,12 +4762,20 @@
                 <a:solidFill>
                   <a:srgbClr val="1A1A1A"/>
                 </a:solidFill>
-                <a:latin typeface="微软雅黑"/>
-                <a:ea typeface="微软雅黑"/>
-                <a:cs typeface="微软雅黑"/>
+                <a:latin typeface="微软雅黑" panose="020B0503020204020204" charset="-122"/>
+                <a:ea typeface="微软雅黑" panose="020B0503020204020204" charset="-122"/>
+                <a:cs typeface="微软雅黑" panose="020B0503020204020204" charset="-122"/>
               </a:rPr>
               <a:t>基础服务层</a:t>
             </a:r>
+            <a:endParaRPr sz="1400" b="1">
+              <a:solidFill>
+                <a:srgbClr val="1A1A1A"/>
+              </a:solidFill>
+              <a:latin typeface="微软雅黑" panose="020B0503020204020204" charset="-122"/>
+              <a:ea typeface="微软雅黑" panose="020B0503020204020204" charset="-122"/>
+              <a:cs typeface="微软雅黑" panose="020B0503020204020204" charset="-122"/>
+            </a:endParaRPr>
           </a:p>
         </p:txBody>
       </p:sp>
@@ -4667,12 +4832,20 @@
                 <a:solidFill>
                   <a:srgbClr val="444444"/>
                 </a:solidFill>
-                <a:latin typeface="微软雅黑"/>
-                <a:ea typeface="微软雅黑"/>
-                <a:cs typeface="微软雅黑"/>
+                <a:latin typeface="微软雅黑" panose="020B0503020204020204" charset="-122"/>
+                <a:ea typeface="微软雅黑" panose="020B0503020204020204" charset="-122"/>
+                <a:cs typeface="微软雅黑" panose="020B0503020204020204" charset="-122"/>
               </a:rPr>
               <a:t>DBUtil 数据库连接与释放　StockEventManager 事件发布　StockChangeListener 监听接口　DbBackupUtil 备份 / 恢复</a:t>
             </a:r>
+            <a:endParaRPr sz="1150" b="0">
+              <a:solidFill>
+                <a:srgbClr val="444444"/>
+              </a:solidFill>
+              <a:latin typeface="微软雅黑" panose="020B0503020204020204" charset="-122"/>
+              <a:ea typeface="微软雅黑" panose="020B0503020204020204" charset="-122"/>
+              <a:cs typeface="微软雅黑" panose="020B0503020204020204" charset="-122"/>
+            </a:endParaRPr>
           </a:p>
         </p:txBody>
       </p:sp>
@@ -4708,12 +4881,20 @@
                 <a:solidFill>
                   <a:srgbClr val="1A1A1A"/>
                 </a:solidFill>
-                <a:latin typeface="微软雅黑"/>
-                <a:ea typeface="微软雅黑"/>
-                <a:cs typeface="微软雅黑"/>
+                <a:latin typeface="微软雅黑" panose="020B0503020204020204" charset="-122"/>
+                <a:ea typeface="微软雅黑" panose="020B0503020204020204" charset="-122"/>
+                <a:cs typeface="微软雅黑" panose="020B0503020204020204" charset="-122"/>
               </a:rPr>
               <a:t>数据存储层  (MySQL)</a:t>
             </a:r>
+            <a:endParaRPr sz="1400" b="1">
+              <a:solidFill>
+                <a:srgbClr val="1A1A1A"/>
+              </a:solidFill>
+              <a:latin typeface="微软雅黑" panose="020B0503020204020204" charset="-122"/>
+              <a:ea typeface="微软雅黑" panose="020B0503020204020204" charset="-122"/>
+              <a:cs typeface="微软雅黑" panose="020B0503020204020204" charset="-122"/>
+            </a:endParaRPr>
           </a:p>
         </p:txBody>
       </p:sp>
@@ -4770,12 +4951,20 @@
                 <a:solidFill>
                   <a:srgbClr val="444444"/>
                 </a:solidFill>
-                <a:latin typeface="微软雅黑"/>
-                <a:ea typeface="微软雅黑"/>
-                <a:cs typeface="微软雅黑"/>
+                <a:latin typeface="微软雅黑" panose="020B0503020204020204" charset="-122"/>
+                <a:ea typeface="微软雅黑" panose="020B0503020204020204" charset="-122"/>
+                <a:cs typeface="微软雅黑" panose="020B0503020204020204" charset="-122"/>
               </a:rPr>
               <a:t>goods 商品表　purchase / purchaseitem　sale / saleitem　supplier / customer</a:t>
             </a:r>
+            <a:endParaRPr sz="1150" b="0">
+              <a:solidFill>
+                <a:srgbClr val="444444"/>
+              </a:solidFill>
+              <a:latin typeface="微软雅黑" panose="020B0503020204020204" charset="-122"/>
+              <a:ea typeface="微软雅黑" panose="020B0503020204020204" charset="-122"/>
+              <a:cs typeface="微软雅黑" panose="020B0503020204020204" charset="-122"/>
+            </a:endParaRPr>
           </a:p>
         </p:txBody>
       </p:sp>
@@ -4788,7 +4977,7 @@
 </file>
 
 <file path=ppt/slides/slide4.xml><?xml version="1.0" encoding="utf-8"?>
-<p:sld xmlns:a="http://schemas.openxmlformats.org/drawingml/2006/main" xmlns:p="http://schemas.openxmlformats.org/presentationml/2006/main" xmlns:r="http://schemas.openxmlformats.org/officeDocument/2006/relationships">
+<p:sld xmlns:a="http://schemas.openxmlformats.org/drawingml/2006/main" xmlns:r="http://schemas.openxmlformats.org/officeDocument/2006/relationships" xmlns:p="http://schemas.openxmlformats.org/presentationml/2006/main">
   <p:cSld>
     <p:spTree>
       <p:nvGrpSpPr>
@@ -4829,12 +5018,20 @@
                 <a:solidFill>
                   <a:srgbClr val="1A1A1A"/>
                 </a:solidFill>
-                <a:latin typeface="微软雅黑"/>
-                <a:ea typeface="微软雅黑"/>
-                <a:cs typeface="微软雅黑"/>
+                <a:latin typeface="微软雅黑" panose="020B0503020204020204" charset="-122"/>
+                <a:ea typeface="微软雅黑" panose="020B0503020204020204" charset="-122"/>
+                <a:cs typeface="微软雅黑" panose="020B0503020204020204" charset="-122"/>
               </a:rPr>
               <a:t>模块演示 · 进货单管理</a:t>
             </a:r>
+            <a:endParaRPr sz="2500" b="1">
+              <a:solidFill>
+                <a:srgbClr val="1A1A1A"/>
+              </a:solidFill>
+              <a:latin typeface="微软雅黑" panose="020B0503020204020204" charset="-122"/>
+              <a:ea typeface="微软雅黑" panose="020B0503020204020204" charset="-122"/>
+              <a:cs typeface="微软雅黑" panose="020B0503020204020204" charset="-122"/>
+            </a:endParaRPr>
           </a:p>
         </p:txBody>
       </p:sp>
@@ -4870,12 +5067,20 @@
                 <a:solidFill>
                   <a:srgbClr val="1F4E79"/>
                 </a:solidFill>
-                <a:latin typeface="微软雅黑"/>
-                <a:ea typeface="微软雅黑"/>
-                <a:cs typeface="微软雅黑"/>
+                <a:latin typeface="微软雅黑" panose="020B0503020204020204" charset="-122"/>
+                <a:ea typeface="微软雅黑" panose="020B0503020204020204" charset="-122"/>
+                <a:cs typeface="微软雅黑" panose="020B0503020204020204" charset="-122"/>
               </a:rPr>
               <a:t>负责人：黄雨轩</a:t>
             </a:r>
+            <a:endParaRPr sz="1300" b="1">
+              <a:solidFill>
+                <a:srgbClr val="1F4E79"/>
+              </a:solidFill>
+              <a:latin typeface="微软雅黑" panose="020B0503020204020204" charset="-122"/>
+              <a:ea typeface="微软雅黑" panose="020B0503020204020204" charset="-122"/>
+              <a:cs typeface="微软雅黑" panose="020B0503020204020204" charset="-122"/>
+            </a:endParaRPr>
           </a:p>
         </p:txBody>
       </p:sp>
@@ -4962,12 +5167,20 @@
                 <a:solidFill>
                   <a:srgbClr val="8A8A8A"/>
                 </a:solidFill>
-                <a:latin typeface="微软雅黑"/>
-                <a:ea typeface="微软雅黑"/>
-                <a:cs typeface="微软雅黑"/>
+                <a:latin typeface="微软雅黑" panose="020B0503020204020204" charset="-122"/>
+                <a:ea typeface="微软雅黑" panose="020B0503020204020204" charset="-122"/>
+                <a:cs typeface="微软雅黑" panose="020B0503020204020204" charset="-122"/>
               </a:rPr>
               <a:t>【 此处插入运行截图 】</a:t>
             </a:r>
+            <a:endParaRPr sz="1300" b="0">
+              <a:solidFill>
+                <a:srgbClr val="8A8A8A"/>
+              </a:solidFill>
+              <a:latin typeface="微软雅黑" panose="020B0503020204020204" charset="-122"/>
+              <a:ea typeface="微软雅黑" panose="020B0503020204020204" charset="-122"/>
+              <a:cs typeface="微软雅黑" panose="020B0503020204020204" charset="-122"/>
+            </a:endParaRPr>
           </a:p>
         </p:txBody>
       </p:sp>
@@ -5003,12 +5216,20 @@
                 <a:solidFill>
                   <a:srgbClr val="B0B0B0"/>
                 </a:solidFill>
-                <a:latin typeface="微软雅黑"/>
-                <a:ea typeface="微软雅黑"/>
-                <a:cs typeface="微软雅黑"/>
+                <a:latin typeface="微软雅黑" panose="020B0503020204020204" charset="-122"/>
+                <a:ea typeface="微软雅黑" panose="020B0503020204020204" charset="-122"/>
+                <a:cs typeface="微软雅黑" panose="020B0503020204020204" charset="-122"/>
               </a:rPr>
               <a:t>运行程序 → 演示该功能 → 截图粘贴到本区域</a:t>
             </a:r>
+            <a:endParaRPr sz="1050" b="0">
+              <a:solidFill>
+                <a:srgbClr val="B0B0B0"/>
+              </a:solidFill>
+              <a:latin typeface="微软雅黑" panose="020B0503020204020204" charset="-122"/>
+              <a:ea typeface="微软雅黑" panose="020B0503020204020204" charset="-122"/>
+              <a:cs typeface="微软雅黑" panose="020B0503020204020204" charset="-122"/>
+            </a:endParaRPr>
           </a:p>
         </p:txBody>
       </p:sp>
@@ -5044,12 +5265,20 @@
                 <a:solidFill>
                   <a:srgbClr val="1A1A1A"/>
                 </a:solidFill>
-                <a:latin typeface="微软雅黑"/>
-                <a:ea typeface="微软雅黑"/>
-                <a:cs typeface="微软雅黑"/>
+                <a:latin typeface="微软雅黑" panose="020B0503020204020204" charset="-122"/>
+                <a:ea typeface="微软雅黑" panose="020B0503020204020204" charset="-122"/>
+                <a:cs typeface="微软雅黑" panose="020B0503020204020204" charset="-122"/>
               </a:rPr>
               <a:t>功能要点</a:t>
             </a:r>
+            <a:endParaRPr sz="1350" b="1">
+              <a:solidFill>
+                <a:srgbClr val="1A1A1A"/>
+              </a:solidFill>
+              <a:latin typeface="微软雅黑" panose="020B0503020204020204" charset="-122"/>
+              <a:ea typeface="微软雅黑" panose="020B0503020204020204" charset="-122"/>
+              <a:cs typeface="微软雅黑" panose="020B0503020204020204" charset="-122"/>
+            </a:endParaRPr>
           </a:p>
         </p:txBody>
       </p:sp>
@@ -5106,12 +5335,20 @@
                 <a:solidFill>
                   <a:srgbClr val="444444"/>
                 </a:solidFill>
-                <a:latin typeface="微软雅黑"/>
-                <a:ea typeface="微软雅黑"/>
-                <a:cs typeface="微软雅黑"/>
+                <a:latin typeface="微软雅黑" panose="020B0503020204020204" charset="-122"/>
+                <a:ea typeface="微软雅黑" panose="020B0503020204020204" charset="-122"/>
+                <a:cs typeface="微软雅黑" panose="020B0503020204020204" charset="-122"/>
               </a:rPr>
               <a:t>— 录入供应商、商品、进货数量与单价</a:t>
             </a:r>
+            <a:endParaRPr sz="1150" b="0">
+              <a:solidFill>
+                <a:srgbClr val="444444"/>
+              </a:solidFill>
+              <a:latin typeface="微软雅黑" panose="020B0503020204020204" charset="-122"/>
+              <a:ea typeface="微软雅黑" panose="020B0503020204020204" charset="-122"/>
+              <a:cs typeface="微软雅黑" panose="020B0503020204020204" charset="-122"/>
+            </a:endParaRPr>
           </a:p>
         </p:txBody>
       </p:sp>
@@ -5147,12 +5384,20 @@
                 <a:solidFill>
                   <a:srgbClr val="444444"/>
                 </a:solidFill>
-                <a:latin typeface="微软雅黑"/>
-                <a:ea typeface="微软雅黑"/>
-                <a:cs typeface="微软雅黑"/>
+                <a:latin typeface="微软雅黑" panose="020B0503020204020204" charset="-122"/>
+                <a:ea typeface="微软雅黑" panose="020B0503020204020204" charset="-122"/>
+                <a:cs typeface="微软雅黑" panose="020B0503020204020204" charset="-122"/>
               </a:rPr>
               <a:t>— 自动计算进货总价</a:t>
             </a:r>
+            <a:endParaRPr sz="1150" b="0">
+              <a:solidFill>
+                <a:srgbClr val="444444"/>
+              </a:solidFill>
+              <a:latin typeface="微软雅黑" panose="020B0503020204020204" charset="-122"/>
+              <a:ea typeface="微软雅黑" panose="020B0503020204020204" charset="-122"/>
+              <a:cs typeface="微软雅黑" panose="020B0503020204020204" charset="-122"/>
+            </a:endParaRPr>
           </a:p>
         </p:txBody>
       </p:sp>
@@ -5188,12 +5433,20 @@
                 <a:solidFill>
                   <a:srgbClr val="444444"/>
                 </a:solidFill>
-                <a:latin typeface="微软雅黑"/>
-                <a:ea typeface="微软雅黑"/>
-                <a:cs typeface="微软雅黑"/>
+                <a:latin typeface="微软雅黑" panose="020B0503020204020204" charset="-122"/>
+                <a:ea typeface="微软雅黑" panose="020B0503020204020204" charset="-122"/>
+                <a:cs typeface="微软雅黑" panose="020B0503020204020204" charset="-122"/>
               </a:rPr>
               <a:t>— 保存后自动增加商品库存</a:t>
             </a:r>
+            <a:endParaRPr sz="1150" b="0">
+              <a:solidFill>
+                <a:srgbClr val="444444"/>
+              </a:solidFill>
+              <a:latin typeface="微软雅黑" panose="020B0503020204020204" charset="-122"/>
+              <a:ea typeface="微软雅黑" panose="020B0503020204020204" charset="-122"/>
+              <a:cs typeface="微软雅黑" panose="020B0503020204020204" charset="-122"/>
+            </a:endParaRPr>
           </a:p>
         </p:txBody>
       </p:sp>
@@ -5229,12 +5482,20 @@
                 <a:solidFill>
                   <a:srgbClr val="444444"/>
                 </a:solidFill>
-                <a:latin typeface="微软雅黑"/>
-                <a:ea typeface="微软雅黑"/>
-                <a:cs typeface="微软雅黑"/>
+                <a:latin typeface="微软雅黑" panose="020B0503020204020204" charset="-122"/>
+                <a:ea typeface="微软雅黑" panose="020B0503020204020204" charset="-122"/>
+                <a:cs typeface="微软雅黑" panose="020B0503020204020204" charset="-122"/>
               </a:rPr>
               <a:t>— 输入校验：非空、数量须大于 0</a:t>
             </a:r>
+            <a:endParaRPr sz="1150" b="0">
+              <a:solidFill>
+                <a:srgbClr val="444444"/>
+              </a:solidFill>
+              <a:latin typeface="微软雅黑" panose="020B0503020204020204" charset="-122"/>
+              <a:ea typeface="微软雅黑" panose="020B0503020204020204" charset="-122"/>
+              <a:cs typeface="微软雅黑" panose="020B0503020204020204" charset="-122"/>
+            </a:endParaRPr>
           </a:p>
         </p:txBody>
       </p:sp>
@@ -5270,12 +5531,20 @@
                 <a:solidFill>
                   <a:srgbClr val="1A1A1A"/>
                 </a:solidFill>
-                <a:latin typeface="微软雅黑"/>
-                <a:ea typeface="微软雅黑"/>
-                <a:cs typeface="微软雅黑"/>
+                <a:latin typeface="微软雅黑" panose="020B0503020204020204" charset="-122"/>
+                <a:ea typeface="微软雅黑" panose="020B0503020204020204" charset="-122"/>
+                <a:cs typeface="微软雅黑" panose="020B0503020204020204" charset="-122"/>
               </a:rPr>
               <a:t>关键技术</a:t>
             </a:r>
+            <a:endParaRPr sz="1350" b="1">
+              <a:solidFill>
+                <a:srgbClr val="1A1A1A"/>
+              </a:solidFill>
+              <a:latin typeface="微软雅黑" panose="020B0503020204020204" charset="-122"/>
+              <a:ea typeface="微软雅黑" panose="020B0503020204020204" charset="-122"/>
+              <a:cs typeface="微软雅黑" panose="020B0503020204020204" charset="-122"/>
+            </a:endParaRPr>
           </a:p>
         </p:txBody>
       </p:sp>
@@ -5332,12 +5601,20 @@
                 <a:solidFill>
                   <a:srgbClr val="444444"/>
                 </a:solidFill>
-                <a:latin typeface="微软雅黑"/>
-                <a:ea typeface="微软雅黑"/>
-                <a:cs typeface="微软雅黑"/>
+                <a:latin typeface="微软雅黑" panose="020B0503020204020204" charset="-122"/>
+                <a:ea typeface="微软雅黑" panose="020B0503020204020204" charset="-122"/>
+                <a:cs typeface="微软雅黑" panose="020B0503020204020204" charset="-122"/>
               </a:rPr>
               <a:t>— 数据库事务：提交 / 回滚保证一致性</a:t>
             </a:r>
+            <a:endParaRPr sz="1150" b="0">
+              <a:solidFill>
+                <a:srgbClr val="444444"/>
+              </a:solidFill>
+              <a:latin typeface="微软雅黑" panose="020B0503020204020204" charset="-122"/>
+              <a:ea typeface="微软雅黑" panose="020B0503020204020204" charset="-122"/>
+              <a:cs typeface="微软雅黑" panose="020B0503020204020204" charset="-122"/>
+            </a:endParaRPr>
           </a:p>
         </p:txBody>
       </p:sp>
@@ -5373,12 +5650,20 @@
                 <a:solidFill>
                   <a:srgbClr val="444444"/>
                 </a:solidFill>
-                <a:latin typeface="微软雅黑"/>
-                <a:ea typeface="微软雅黑"/>
-                <a:cs typeface="微软雅黑"/>
+                <a:latin typeface="微软雅黑" panose="020B0503020204020204" charset="-122"/>
+                <a:ea typeface="微软雅黑" panose="020B0503020204020204" charset="-122"/>
+                <a:cs typeface="微软雅黑" panose="020B0503020204020204" charset="-122"/>
               </a:rPr>
               <a:t>— 语句预编译，并取回自增的主键</a:t>
             </a:r>
+            <a:endParaRPr sz="1150" b="0">
+              <a:solidFill>
+                <a:srgbClr val="444444"/>
+              </a:solidFill>
+              <a:latin typeface="微软雅黑" panose="020B0503020204020204" charset="-122"/>
+              <a:ea typeface="微软雅黑" panose="020B0503020204020204" charset="-122"/>
+              <a:cs typeface="微软雅黑" panose="020B0503020204020204" charset="-122"/>
+            </a:endParaRPr>
           </a:p>
         </p:txBody>
       </p:sp>
@@ -5414,12 +5699,20 @@
                 <a:solidFill>
                   <a:srgbClr val="444444"/>
                 </a:solidFill>
-                <a:latin typeface="微软雅黑"/>
-                <a:ea typeface="微软雅黑"/>
-                <a:cs typeface="微软雅黑"/>
+                <a:latin typeface="微软雅黑" panose="020B0503020204020204" charset="-122"/>
+                <a:ea typeface="微软雅黑" panose="020B0503020204020204" charset="-122"/>
+                <a:cs typeface="微软雅黑" panose="020B0503020204020204" charset="-122"/>
               </a:rPr>
               <a:t>— 进货主表与明细表同时写入</a:t>
             </a:r>
+            <a:endParaRPr sz="1150" b="0">
+              <a:solidFill>
+                <a:srgbClr val="444444"/>
+              </a:solidFill>
+              <a:latin typeface="微软雅黑" panose="020B0503020204020204" charset="-122"/>
+              <a:ea typeface="微软雅黑" panose="020B0503020204020204" charset="-122"/>
+              <a:cs typeface="微软雅黑" panose="020B0503020204020204" charset="-122"/>
+            </a:endParaRPr>
           </a:p>
         </p:txBody>
       </p:sp>
@@ -5455,15 +5748,47 @@
                 <a:solidFill>
                   <a:srgbClr val="444444"/>
                 </a:solidFill>
-                <a:latin typeface="微软雅黑"/>
-                <a:ea typeface="微软雅黑"/>
-                <a:cs typeface="微软雅黑"/>
+                <a:latin typeface="微软雅黑" panose="020B0503020204020204" charset="-122"/>
+                <a:ea typeface="微软雅黑" panose="020B0503020204020204" charset="-122"/>
+                <a:cs typeface="微软雅黑" panose="020B0503020204020204" charset="-122"/>
               </a:rPr>
               <a:t>— 库存联动：stock = stock + 数量</a:t>
             </a:r>
-          </a:p>
-        </p:txBody>
-      </p:sp>
+            <a:endParaRPr sz="1150" b="0">
+              <a:solidFill>
+                <a:srgbClr val="444444"/>
+              </a:solidFill>
+              <a:latin typeface="微软雅黑" panose="020B0503020204020204" charset="-122"/>
+              <a:ea typeface="微软雅黑" panose="020B0503020204020204" charset="-122"/>
+              <a:cs typeface="微软雅黑" panose="020B0503020204020204" charset="-122"/>
+            </a:endParaRPr>
+          </a:p>
+        </p:txBody>
+      </p:sp>
+      <p:pic>
+        <p:nvPicPr>
+          <p:cNvPr id="20" name="图片 19" descr="屏幕截图 2026-09-23 183333"/>
+          <p:cNvPicPr>
+            <a:picLocks noChangeAspect="1"/>
+          </p:cNvPicPr>
+          <p:nvPr/>
+        </p:nvPicPr>
+        <p:blipFill>
+          <a:blip r:embed="rId1"/>
+          <a:stretch>
+            <a:fillRect/>
+          </a:stretch>
+        </p:blipFill>
+        <p:spPr>
+          <a:xfrm>
+            <a:off x="1005840" y="1810385"/>
+            <a:ext cx="6682105" cy="4160520"/>
+          </a:xfrm>
+          <a:prstGeom prst="rect">
+            <a:avLst/>
+          </a:prstGeom>
+        </p:spPr>
+      </p:pic>
     </p:spTree>
   </p:cSld>
   <p:clrMapOvr>
@@ -5473,7 +5798,7 @@
 </file>
 
 <file path=ppt/slides/slide5.xml><?xml version="1.0" encoding="utf-8"?>
-<p:sld xmlns:a="http://schemas.openxmlformats.org/drawingml/2006/main" xmlns:p="http://schemas.openxmlformats.org/presentationml/2006/main" xmlns:r="http://schemas.openxmlformats.org/officeDocument/2006/relationships">
+<p:sld xmlns:a="http://schemas.openxmlformats.org/drawingml/2006/main" xmlns:r="http://schemas.openxmlformats.org/officeDocument/2006/relationships" xmlns:p="http://schemas.openxmlformats.org/presentationml/2006/main">
   <p:cSld>
     <p:spTree>
       <p:nvGrpSpPr>
@@ -5514,12 +5839,20 @@
                 <a:solidFill>
                   <a:srgbClr val="1A1A1A"/>
                 </a:solidFill>
-                <a:latin typeface="微软雅黑"/>
-                <a:ea typeface="微软雅黑"/>
-                <a:cs typeface="微软雅黑"/>
+                <a:latin typeface="微软雅黑" panose="020B0503020204020204" charset="-122"/>
+                <a:ea typeface="微软雅黑" panose="020B0503020204020204" charset="-122"/>
+                <a:cs typeface="微软雅黑" panose="020B0503020204020204" charset="-122"/>
               </a:rPr>
               <a:t>模块演示 · 销售单管理</a:t>
             </a:r>
+            <a:endParaRPr sz="2500" b="1">
+              <a:solidFill>
+                <a:srgbClr val="1A1A1A"/>
+              </a:solidFill>
+              <a:latin typeface="微软雅黑" panose="020B0503020204020204" charset="-122"/>
+              <a:ea typeface="微软雅黑" panose="020B0503020204020204" charset="-122"/>
+              <a:cs typeface="微软雅黑" panose="020B0503020204020204" charset="-122"/>
+            </a:endParaRPr>
           </a:p>
         </p:txBody>
       </p:sp>
@@ -5555,12 +5888,20 @@
                 <a:solidFill>
                   <a:srgbClr val="1F4E79"/>
                 </a:solidFill>
-                <a:latin typeface="微软雅黑"/>
-                <a:ea typeface="微软雅黑"/>
-                <a:cs typeface="微软雅黑"/>
+                <a:latin typeface="微软雅黑" panose="020B0503020204020204" charset="-122"/>
+                <a:ea typeface="微软雅黑" panose="020B0503020204020204" charset="-122"/>
+                <a:cs typeface="微软雅黑" panose="020B0503020204020204" charset="-122"/>
               </a:rPr>
               <a:t>负责人：马俊浩</a:t>
             </a:r>
+            <a:endParaRPr sz="1300" b="1">
+              <a:solidFill>
+                <a:srgbClr val="1F4E79"/>
+              </a:solidFill>
+              <a:latin typeface="微软雅黑" panose="020B0503020204020204" charset="-122"/>
+              <a:ea typeface="微软雅黑" panose="020B0503020204020204" charset="-122"/>
+              <a:cs typeface="微软雅黑" panose="020B0503020204020204" charset="-122"/>
+            </a:endParaRPr>
           </a:p>
         </p:txBody>
       </p:sp>
@@ -5647,12 +5988,20 @@
                 <a:solidFill>
                   <a:srgbClr val="8A8A8A"/>
                 </a:solidFill>
-                <a:latin typeface="微软雅黑"/>
-                <a:ea typeface="微软雅黑"/>
-                <a:cs typeface="微软雅黑"/>
+                <a:latin typeface="微软雅黑" panose="020B0503020204020204" charset="-122"/>
+                <a:ea typeface="微软雅黑" panose="020B0503020204020204" charset="-122"/>
+                <a:cs typeface="微软雅黑" panose="020B0503020204020204" charset="-122"/>
               </a:rPr>
               <a:t>【 此处插入运行截图 】</a:t>
             </a:r>
+            <a:endParaRPr sz="1300" b="0">
+              <a:solidFill>
+                <a:srgbClr val="8A8A8A"/>
+              </a:solidFill>
+              <a:latin typeface="微软雅黑" panose="020B0503020204020204" charset="-122"/>
+              <a:ea typeface="微软雅黑" panose="020B0503020204020204" charset="-122"/>
+              <a:cs typeface="微软雅黑" panose="020B0503020204020204" charset="-122"/>
+            </a:endParaRPr>
           </a:p>
         </p:txBody>
       </p:sp>
@@ -5688,12 +6037,20 @@
                 <a:solidFill>
                   <a:srgbClr val="B0B0B0"/>
                 </a:solidFill>
-                <a:latin typeface="微软雅黑"/>
-                <a:ea typeface="微软雅黑"/>
-                <a:cs typeface="微软雅黑"/>
+                <a:latin typeface="微软雅黑" panose="020B0503020204020204" charset="-122"/>
+                <a:ea typeface="微软雅黑" panose="020B0503020204020204" charset="-122"/>
+                <a:cs typeface="微软雅黑" panose="020B0503020204020204" charset="-122"/>
               </a:rPr>
               <a:t>运行程序 → 演示该功能 → 截图粘贴到本区域</a:t>
             </a:r>
+            <a:endParaRPr sz="1050" b="0">
+              <a:solidFill>
+                <a:srgbClr val="B0B0B0"/>
+              </a:solidFill>
+              <a:latin typeface="微软雅黑" panose="020B0503020204020204" charset="-122"/>
+              <a:ea typeface="微软雅黑" panose="020B0503020204020204" charset="-122"/>
+              <a:cs typeface="微软雅黑" panose="020B0503020204020204" charset="-122"/>
+            </a:endParaRPr>
           </a:p>
         </p:txBody>
       </p:sp>
@@ -5729,12 +6086,20 @@
                 <a:solidFill>
                   <a:srgbClr val="1A1A1A"/>
                 </a:solidFill>
-                <a:latin typeface="微软雅黑"/>
-                <a:ea typeface="微软雅黑"/>
-                <a:cs typeface="微软雅黑"/>
+                <a:latin typeface="微软雅黑" panose="020B0503020204020204" charset="-122"/>
+                <a:ea typeface="微软雅黑" panose="020B0503020204020204" charset="-122"/>
+                <a:cs typeface="微软雅黑" panose="020B0503020204020204" charset="-122"/>
               </a:rPr>
               <a:t>功能要点</a:t>
             </a:r>
+            <a:endParaRPr sz="1350" b="1">
+              <a:solidFill>
+                <a:srgbClr val="1A1A1A"/>
+              </a:solidFill>
+              <a:latin typeface="微软雅黑" panose="020B0503020204020204" charset="-122"/>
+              <a:ea typeface="微软雅黑" panose="020B0503020204020204" charset="-122"/>
+              <a:cs typeface="微软雅黑" panose="020B0503020204020204" charset="-122"/>
+            </a:endParaRPr>
           </a:p>
         </p:txBody>
       </p:sp>
@@ -5791,12 +6156,20 @@
                 <a:solidFill>
                   <a:srgbClr val="444444"/>
                 </a:solidFill>
-                <a:latin typeface="微软雅黑"/>
-                <a:ea typeface="微软雅黑"/>
-                <a:cs typeface="微软雅黑"/>
+                <a:latin typeface="微软雅黑" panose="020B0503020204020204" charset="-122"/>
+                <a:ea typeface="微软雅黑" panose="020B0503020204020204" charset="-122"/>
+                <a:cs typeface="微软雅黑" panose="020B0503020204020204" charset="-122"/>
               </a:rPr>
               <a:t>— 录入客户、商品、销售数量与单价</a:t>
             </a:r>
+            <a:endParaRPr sz="1150" b="0">
+              <a:solidFill>
+                <a:srgbClr val="444444"/>
+              </a:solidFill>
+              <a:latin typeface="微软雅黑" panose="020B0503020204020204" charset="-122"/>
+              <a:ea typeface="微软雅黑" panose="020B0503020204020204" charset="-122"/>
+              <a:cs typeface="微软雅黑" panose="020B0503020204020204" charset="-122"/>
+            </a:endParaRPr>
           </a:p>
         </p:txBody>
       </p:sp>
@@ -5832,12 +6205,20 @@
                 <a:solidFill>
                   <a:srgbClr val="444444"/>
                 </a:solidFill>
-                <a:latin typeface="微软雅黑"/>
-                <a:ea typeface="微软雅黑"/>
-                <a:cs typeface="微软雅黑"/>
+                <a:latin typeface="微软雅黑" panose="020B0503020204020204" charset="-122"/>
+                <a:ea typeface="微软雅黑" panose="020B0503020204020204" charset="-122"/>
+                <a:cs typeface="微软雅黑" panose="020B0503020204020204" charset="-122"/>
               </a:rPr>
               <a:t>— 自动计算销售总金额</a:t>
             </a:r>
+            <a:endParaRPr sz="1150" b="0">
+              <a:solidFill>
+                <a:srgbClr val="444444"/>
+              </a:solidFill>
+              <a:latin typeface="微软雅黑" panose="020B0503020204020204" charset="-122"/>
+              <a:ea typeface="微软雅黑" panose="020B0503020204020204" charset="-122"/>
+              <a:cs typeface="微软雅黑" panose="020B0503020204020204" charset="-122"/>
+            </a:endParaRPr>
           </a:p>
         </p:txBody>
       </p:sp>
@@ -5873,12 +6254,20 @@
                 <a:solidFill>
                   <a:srgbClr val="444444"/>
                 </a:solidFill>
-                <a:latin typeface="微软雅黑"/>
-                <a:ea typeface="微软雅黑"/>
-                <a:cs typeface="微软雅黑"/>
+                <a:latin typeface="微软雅黑" panose="020B0503020204020204" charset="-122"/>
+                <a:ea typeface="微软雅黑" panose="020B0503020204020204" charset="-122"/>
+                <a:cs typeface="微软雅黑" panose="020B0503020204020204" charset="-122"/>
               </a:rPr>
               <a:t>— 保存后自动扣减商品库存</a:t>
             </a:r>
+            <a:endParaRPr sz="1150" b="0">
+              <a:solidFill>
+                <a:srgbClr val="444444"/>
+              </a:solidFill>
+              <a:latin typeface="微软雅黑" panose="020B0503020204020204" charset="-122"/>
+              <a:ea typeface="微软雅黑" panose="020B0503020204020204" charset="-122"/>
+              <a:cs typeface="微软雅黑" panose="020B0503020204020204" charset="-122"/>
+            </a:endParaRPr>
           </a:p>
         </p:txBody>
       </p:sp>
@@ -5914,12 +6303,20 @@
                 <a:solidFill>
                   <a:srgbClr val="444444"/>
                 </a:solidFill>
-                <a:latin typeface="微软雅黑"/>
-                <a:ea typeface="微软雅黑"/>
-                <a:cs typeface="微软雅黑"/>
+                <a:latin typeface="微软雅黑" panose="020B0503020204020204" charset="-122"/>
+                <a:ea typeface="微软雅黑" panose="020B0503020204020204" charset="-122"/>
+                <a:cs typeface="微软雅黑" panose="020B0503020204020204" charset="-122"/>
               </a:rPr>
               <a:t>— 库存不足时保存失败并提示</a:t>
             </a:r>
+            <a:endParaRPr sz="1150" b="0">
+              <a:solidFill>
+                <a:srgbClr val="444444"/>
+              </a:solidFill>
+              <a:latin typeface="微软雅黑" panose="020B0503020204020204" charset="-122"/>
+              <a:ea typeface="微软雅黑" panose="020B0503020204020204" charset="-122"/>
+              <a:cs typeface="微软雅黑" panose="020B0503020204020204" charset="-122"/>
+            </a:endParaRPr>
           </a:p>
         </p:txBody>
       </p:sp>
@@ -5955,12 +6352,20 @@
                 <a:solidFill>
                   <a:srgbClr val="1A1A1A"/>
                 </a:solidFill>
-                <a:latin typeface="微软雅黑"/>
-                <a:ea typeface="微软雅黑"/>
-                <a:cs typeface="微软雅黑"/>
+                <a:latin typeface="微软雅黑" panose="020B0503020204020204" charset="-122"/>
+                <a:ea typeface="微软雅黑" panose="020B0503020204020204" charset="-122"/>
+                <a:cs typeface="微软雅黑" panose="020B0503020204020204" charset="-122"/>
               </a:rPr>
               <a:t>关键技术</a:t>
             </a:r>
+            <a:endParaRPr sz="1350" b="1">
+              <a:solidFill>
+                <a:srgbClr val="1A1A1A"/>
+              </a:solidFill>
+              <a:latin typeface="微软雅黑" panose="020B0503020204020204" charset="-122"/>
+              <a:ea typeface="微软雅黑" panose="020B0503020204020204" charset="-122"/>
+              <a:cs typeface="微软雅黑" panose="020B0503020204020204" charset="-122"/>
+            </a:endParaRPr>
           </a:p>
         </p:txBody>
       </p:sp>
@@ -6017,12 +6422,20 @@
                 <a:solidFill>
                   <a:srgbClr val="444444"/>
                 </a:solidFill>
-                <a:latin typeface="微软雅黑"/>
-                <a:ea typeface="微软雅黑"/>
-                <a:cs typeface="微软雅黑"/>
+                <a:latin typeface="微软雅黑" panose="020B0503020204020204" charset="-122"/>
+                <a:ea typeface="微软雅黑" panose="020B0503020204020204" charset="-122"/>
+                <a:cs typeface="微软雅黑" panose="020B0503020204020204" charset="-122"/>
               </a:rPr>
               <a:t>— 事务写入主表 sale 与明细表 saleitem</a:t>
             </a:r>
+            <a:endParaRPr sz="1150" b="0">
+              <a:solidFill>
+                <a:srgbClr val="444444"/>
+              </a:solidFill>
+              <a:latin typeface="微软雅黑" panose="020B0503020204020204" charset="-122"/>
+              <a:ea typeface="微软雅黑" panose="020B0503020204020204" charset="-122"/>
+              <a:cs typeface="微软雅黑" panose="020B0503020204020204" charset="-122"/>
+            </a:endParaRPr>
           </a:p>
         </p:txBody>
       </p:sp>
@@ -6058,12 +6471,20 @@
                 <a:solidFill>
                   <a:srgbClr val="444444"/>
                 </a:solidFill>
-                <a:latin typeface="微软雅黑"/>
-                <a:ea typeface="微软雅黑"/>
-                <a:cs typeface="微软雅黑"/>
+                <a:latin typeface="微软雅黑" panose="020B0503020204020204" charset="-122"/>
+                <a:ea typeface="微软雅黑" panose="020B0503020204020204" charset="-122"/>
+                <a:cs typeface="微软雅黑" panose="020B0503020204020204" charset="-122"/>
               </a:rPr>
               <a:t>— 库存联动：stock = stock − 数量</a:t>
             </a:r>
+            <a:endParaRPr sz="1150" b="0">
+              <a:solidFill>
+                <a:srgbClr val="444444"/>
+              </a:solidFill>
+              <a:latin typeface="微软雅黑" panose="020B0503020204020204" charset="-122"/>
+              <a:ea typeface="微软雅黑" panose="020B0503020204020204" charset="-122"/>
+              <a:cs typeface="微软雅黑" panose="020B0503020204020204" charset="-122"/>
+            </a:endParaRPr>
           </a:p>
         </p:txBody>
       </p:sp>
@@ -6099,12 +6520,20 @@
                 <a:solidFill>
                   <a:srgbClr val="444444"/>
                 </a:solidFill>
-                <a:latin typeface="微软雅黑"/>
-                <a:ea typeface="微软雅黑"/>
-                <a:cs typeface="微软雅黑"/>
+                <a:latin typeface="微软雅黑" panose="020B0503020204020204" charset="-122"/>
+                <a:ea typeface="微软雅黑" panose="020B0503020204020204" charset="-122"/>
+                <a:cs typeface="微软雅黑" panose="020B0503020204020204" charset="-122"/>
               </a:rPr>
               <a:t>— 返回成功 / 失败，由界面提示结果</a:t>
             </a:r>
+            <a:endParaRPr sz="1150" b="0">
+              <a:solidFill>
+                <a:srgbClr val="444444"/>
+              </a:solidFill>
+              <a:latin typeface="微软雅黑" panose="020B0503020204020204" charset="-122"/>
+              <a:ea typeface="微软雅黑" panose="020B0503020204020204" charset="-122"/>
+              <a:cs typeface="微软雅黑" panose="020B0503020204020204" charset="-122"/>
+            </a:endParaRPr>
           </a:p>
         </p:txBody>
       </p:sp>
@@ -6140,15 +6569,47 @@
                 <a:solidFill>
                   <a:srgbClr val="444444"/>
                 </a:solidFill>
-                <a:latin typeface="微软雅黑"/>
-                <a:ea typeface="微软雅黑"/>
-                <a:cs typeface="微软雅黑"/>
+                <a:latin typeface="微软雅黑" panose="020B0503020204020204" charset="-122"/>
+                <a:ea typeface="微软雅黑" panose="020B0503020204020204" charset="-122"/>
+                <a:cs typeface="微软雅黑" panose="020B0503020204020204" charset="-122"/>
               </a:rPr>
               <a:t>— 按钮事件用 lambda 注册</a:t>
             </a:r>
-          </a:p>
-        </p:txBody>
-      </p:sp>
+            <a:endParaRPr sz="1150" b="0">
+              <a:solidFill>
+                <a:srgbClr val="444444"/>
+              </a:solidFill>
+              <a:latin typeface="微软雅黑" panose="020B0503020204020204" charset="-122"/>
+              <a:ea typeface="微软雅黑" panose="020B0503020204020204" charset="-122"/>
+              <a:cs typeface="微软雅黑" panose="020B0503020204020204" charset="-122"/>
+            </a:endParaRPr>
+          </a:p>
+        </p:txBody>
+      </p:sp>
+      <p:pic>
+        <p:nvPicPr>
+          <p:cNvPr id="20" name="图片 19" descr="屏幕截图 2026-09-23 183359"/>
+          <p:cNvPicPr>
+            <a:picLocks noChangeAspect="1"/>
+          </p:cNvPicPr>
+          <p:nvPr/>
+        </p:nvPicPr>
+        <p:blipFill>
+          <a:blip r:embed="rId1"/>
+          <a:stretch>
+            <a:fillRect/>
+          </a:stretch>
+        </p:blipFill>
+        <p:spPr>
+          <a:xfrm>
+            <a:off x="1005840" y="1810385"/>
+            <a:ext cx="6675120" cy="4185285"/>
+          </a:xfrm>
+          <a:prstGeom prst="rect">
+            <a:avLst/>
+          </a:prstGeom>
+        </p:spPr>
+      </p:pic>
     </p:spTree>
   </p:cSld>
   <p:clrMapOvr>
@@ -6158,7 +6619,7 @@
 </file>
 
 <file path=ppt/slides/slide6.xml><?xml version="1.0" encoding="utf-8"?>
-<p:sld xmlns:a="http://schemas.openxmlformats.org/drawingml/2006/main" xmlns:p="http://schemas.openxmlformats.org/presentationml/2006/main" xmlns:r="http://schemas.openxmlformats.org/officeDocument/2006/relationships">
+<p:sld xmlns:a="http://schemas.openxmlformats.org/drawingml/2006/main" xmlns:r="http://schemas.openxmlformats.org/officeDocument/2006/relationships" xmlns:p="http://schemas.openxmlformats.org/presentationml/2006/main">
   <p:cSld>
     <p:spTree>
       <p:nvGrpSpPr>
@@ -6199,12 +6660,20 @@
                 <a:solidFill>
                   <a:srgbClr val="1A1A1A"/>
                 </a:solidFill>
-                <a:latin typeface="微软雅黑"/>
-                <a:ea typeface="微软雅黑"/>
-                <a:cs typeface="微软雅黑"/>
+                <a:latin typeface="微软雅黑" panose="020B0503020204020204" charset="-122"/>
+                <a:ea typeface="微软雅黑" panose="020B0503020204020204" charset="-122"/>
+                <a:cs typeface="微软雅黑" panose="020B0503020204020204" charset="-122"/>
               </a:rPr>
               <a:t>模块演示 · 库存盘点</a:t>
             </a:r>
+            <a:endParaRPr sz="2500" b="1">
+              <a:solidFill>
+                <a:srgbClr val="1A1A1A"/>
+              </a:solidFill>
+              <a:latin typeface="微软雅黑" panose="020B0503020204020204" charset="-122"/>
+              <a:ea typeface="微软雅黑" panose="020B0503020204020204" charset="-122"/>
+              <a:cs typeface="微软雅黑" panose="020B0503020204020204" charset="-122"/>
+            </a:endParaRPr>
           </a:p>
         </p:txBody>
       </p:sp>
@@ -6240,12 +6709,20 @@
                 <a:solidFill>
                   <a:srgbClr val="1F4E79"/>
                 </a:solidFill>
-                <a:latin typeface="微软雅黑"/>
-                <a:ea typeface="微软雅黑"/>
-                <a:cs typeface="微软雅黑"/>
+                <a:latin typeface="微软雅黑" panose="020B0503020204020204" charset="-122"/>
+                <a:ea typeface="微软雅黑" panose="020B0503020204020204" charset="-122"/>
+                <a:cs typeface="微软雅黑" panose="020B0503020204020204" charset="-122"/>
               </a:rPr>
               <a:t>负责人：马俊浩</a:t>
             </a:r>
+            <a:endParaRPr sz="1300" b="1">
+              <a:solidFill>
+                <a:srgbClr val="1F4E79"/>
+              </a:solidFill>
+              <a:latin typeface="微软雅黑" panose="020B0503020204020204" charset="-122"/>
+              <a:ea typeface="微软雅黑" panose="020B0503020204020204" charset="-122"/>
+              <a:cs typeface="微软雅黑" panose="020B0503020204020204" charset="-122"/>
+            </a:endParaRPr>
           </a:p>
         </p:txBody>
       </p:sp>
@@ -6332,12 +6809,20 @@
                 <a:solidFill>
                   <a:srgbClr val="8A8A8A"/>
                 </a:solidFill>
-                <a:latin typeface="微软雅黑"/>
-                <a:ea typeface="微软雅黑"/>
-                <a:cs typeface="微软雅黑"/>
+                <a:latin typeface="微软雅黑" panose="020B0503020204020204" charset="-122"/>
+                <a:ea typeface="微软雅黑" panose="020B0503020204020204" charset="-122"/>
+                <a:cs typeface="微软雅黑" panose="020B0503020204020204" charset="-122"/>
               </a:rPr>
               <a:t>【 此处插入运行截图 】</a:t>
             </a:r>
+            <a:endParaRPr sz="1300" b="0">
+              <a:solidFill>
+                <a:srgbClr val="8A8A8A"/>
+              </a:solidFill>
+              <a:latin typeface="微软雅黑" panose="020B0503020204020204" charset="-122"/>
+              <a:ea typeface="微软雅黑" panose="020B0503020204020204" charset="-122"/>
+              <a:cs typeface="微软雅黑" panose="020B0503020204020204" charset="-122"/>
+            </a:endParaRPr>
           </a:p>
         </p:txBody>
       </p:sp>
@@ -6373,12 +6858,20 @@
                 <a:solidFill>
                   <a:srgbClr val="B0B0B0"/>
                 </a:solidFill>
-                <a:latin typeface="微软雅黑"/>
-                <a:ea typeface="微软雅黑"/>
-                <a:cs typeface="微软雅黑"/>
+                <a:latin typeface="微软雅黑" panose="020B0503020204020204" charset="-122"/>
+                <a:ea typeface="微软雅黑" panose="020B0503020204020204" charset="-122"/>
+                <a:cs typeface="微软雅黑" panose="020B0503020204020204" charset="-122"/>
               </a:rPr>
               <a:t>运行程序 → 演示该功能 → 截图粘贴到本区域</a:t>
             </a:r>
+            <a:endParaRPr sz="1050" b="0">
+              <a:solidFill>
+                <a:srgbClr val="B0B0B0"/>
+              </a:solidFill>
+              <a:latin typeface="微软雅黑" panose="020B0503020204020204" charset="-122"/>
+              <a:ea typeface="微软雅黑" panose="020B0503020204020204" charset="-122"/>
+              <a:cs typeface="微软雅黑" panose="020B0503020204020204" charset="-122"/>
+            </a:endParaRPr>
           </a:p>
         </p:txBody>
       </p:sp>
@@ -6414,12 +6907,20 @@
                 <a:solidFill>
                   <a:srgbClr val="1A1A1A"/>
                 </a:solidFill>
-                <a:latin typeface="微软雅黑"/>
-                <a:ea typeface="微软雅黑"/>
-                <a:cs typeface="微软雅黑"/>
+                <a:latin typeface="微软雅黑" panose="020B0503020204020204" charset="-122"/>
+                <a:ea typeface="微软雅黑" panose="020B0503020204020204" charset="-122"/>
+                <a:cs typeface="微软雅黑" panose="020B0503020204020204" charset="-122"/>
               </a:rPr>
               <a:t>功能要点</a:t>
             </a:r>
+            <a:endParaRPr sz="1350" b="1">
+              <a:solidFill>
+                <a:srgbClr val="1A1A1A"/>
+              </a:solidFill>
+              <a:latin typeface="微软雅黑" panose="020B0503020204020204" charset="-122"/>
+              <a:ea typeface="微软雅黑" panose="020B0503020204020204" charset="-122"/>
+              <a:cs typeface="微软雅黑" panose="020B0503020204020204" charset="-122"/>
+            </a:endParaRPr>
           </a:p>
         </p:txBody>
       </p:sp>
@@ -6476,12 +6977,20 @@
                 <a:solidFill>
                   <a:srgbClr val="444444"/>
                 </a:solidFill>
-                <a:latin typeface="微软雅黑"/>
-                <a:ea typeface="微软雅黑"/>
-                <a:cs typeface="微软雅黑"/>
+                <a:latin typeface="微软雅黑" panose="020B0503020204020204" charset="-122"/>
+                <a:ea typeface="微软雅黑" panose="020B0503020204020204" charset="-122"/>
+                <a:cs typeface="微软雅黑" panose="020B0503020204020204" charset="-122"/>
               </a:rPr>
               <a:t>— 表格展示商品编号、名称、系统库存</a:t>
             </a:r>
+            <a:endParaRPr sz="1150" b="0">
+              <a:solidFill>
+                <a:srgbClr val="444444"/>
+              </a:solidFill>
+              <a:latin typeface="微软雅黑" panose="020B0503020204020204" charset="-122"/>
+              <a:ea typeface="微软雅黑" panose="020B0503020204020204" charset="-122"/>
+              <a:cs typeface="微软雅黑" panose="020B0503020204020204" charset="-122"/>
+            </a:endParaRPr>
           </a:p>
         </p:txBody>
       </p:sp>
@@ -6517,12 +7026,20 @@
                 <a:solidFill>
                   <a:srgbClr val="444444"/>
                 </a:solidFill>
-                <a:latin typeface="微软雅黑"/>
-                <a:ea typeface="微软雅黑"/>
-                <a:cs typeface="微软雅黑"/>
+                <a:latin typeface="微软雅黑" panose="020B0503020204020204" charset="-122"/>
+                <a:ea typeface="微软雅黑" panose="020B0503020204020204" charset="-122"/>
+                <a:cs typeface="微软雅黑" panose="020B0503020204020204" charset="-122"/>
               </a:rPr>
               <a:t>— 仅「实际盘点数」一列可编辑</a:t>
             </a:r>
+            <a:endParaRPr sz="1150" b="0">
+              <a:solidFill>
+                <a:srgbClr val="444444"/>
+              </a:solidFill>
+              <a:latin typeface="微软雅黑" panose="020B0503020204020204" charset="-122"/>
+              <a:ea typeface="微软雅黑" panose="020B0503020204020204" charset="-122"/>
+              <a:cs typeface="微软雅黑" panose="020B0503020204020204" charset="-122"/>
+            </a:endParaRPr>
           </a:p>
         </p:txBody>
       </p:sp>
@@ -6558,12 +7075,20 @@
                 <a:solidFill>
                   <a:srgbClr val="444444"/>
                 </a:solidFill>
-                <a:latin typeface="微软雅黑"/>
-                <a:ea typeface="微软雅黑"/>
-                <a:cs typeface="微软雅黑"/>
+                <a:latin typeface="微软雅黑" panose="020B0503020204020204" charset="-122"/>
+                <a:ea typeface="微软雅黑" panose="020B0503020204020204" charset="-122"/>
+                <a:cs typeface="微软雅黑" panose="020B0503020204020204" charset="-122"/>
               </a:rPr>
               <a:t>— 输入后自动计算盘盈盘亏</a:t>
             </a:r>
+            <a:endParaRPr sz="1150" b="0">
+              <a:solidFill>
+                <a:srgbClr val="444444"/>
+              </a:solidFill>
+              <a:latin typeface="微软雅黑" panose="020B0503020204020204" charset="-122"/>
+              <a:ea typeface="微软雅黑" panose="020B0503020204020204" charset="-122"/>
+              <a:cs typeface="微软雅黑" panose="020B0503020204020204" charset="-122"/>
+            </a:endParaRPr>
           </a:p>
         </p:txBody>
       </p:sp>
@@ -6599,12 +7124,20 @@
                 <a:solidFill>
                   <a:srgbClr val="444444"/>
                 </a:solidFill>
-                <a:latin typeface="微软雅黑"/>
-                <a:ea typeface="微软雅黑"/>
-                <a:cs typeface="微软雅黑"/>
+                <a:latin typeface="微软雅黑" panose="020B0503020204020204" charset="-122"/>
+                <a:ea typeface="微软雅黑" panose="020B0503020204020204" charset="-122"/>
+                <a:cs typeface="微软雅黑" panose="020B0503020204020204" charset="-122"/>
               </a:rPr>
               <a:t>— 保存后批量更新库存</a:t>
             </a:r>
+            <a:endParaRPr sz="1150" b="0">
+              <a:solidFill>
+                <a:srgbClr val="444444"/>
+              </a:solidFill>
+              <a:latin typeface="微软雅黑" panose="020B0503020204020204" charset="-122"/>
+              <a:ea typeface="微软雅黑" panose="020B0503020204020204" charset="-122"/>
+              <a:cs typeface="微软雅黑" panose="020B0503020204020204" charset="-122"/>
+            </a:endParaRPr>
           </a:p>
         </p:txBody>
       </p:sp>
@@ -6640,12 +7173,20 @@
                 <a:solidFill>
                   <a:srgbClr val="1A1A1A"/>
                 </a:solidFill>
-                <a:latin typeface="微软雅黑"/>
-                <a:ea typeface="微软雅黑"/>
-                <a:cs typeface="微软雅黑"/>
+                <a:latin typeface="微软雅黑" panose="020B0503020204020204" charset="-122"/>
+                <a:ea typeface="微软雅黑" panose="020B0503020204020204" charset="-122"/>
+                <a:cs typeface="微软雅黑" panose="020B0503020204020204" charset="-122"/>
               </a:rPr>
               <a:t>关键技术</a:t>
             </a:r>
+            <a:endParaRPr sz="1350" b="1">
+              <a:solidFill>
+                <a:srgbClr val="1A1A1A"/>
+              </a:solidFill>
+              <a:latin typeface="微软雅黑" panose="020B0503020204020204" charset="-122"/>
+              <a:ea typeface="微软雅黑" panose="020B0503020204020204" charset="-122"/>
+              <a:cs typeface="微软雅黑" panose="020B0503020204020204" charset="-122"/>
+            </a:endParaRPr>
           </a:p>
         </p:txBody>
       </p:sp>
@@ -6702,12 +7243,20 @@
                 <a:solidFill>
                   <a:srgbClr val="444444"/>
                 </a:solidFill>
-                <a:latin typeface="微软雅黑"/>
-                <a:ea typeface="微软雅黑"/>
-                <a:cs typeface="微软雅黑"/>
+                <a:latin typeface="微软雅黑" panose="020B0503020204020204" charset="-122"/>
+                <a:ea typeface="微软雅黑" panose="020B0503020204020204" charset="-122"/>
+                <a:cs typeface="微软雅黑" panose="020B0503020204020204" charset="-122"/>
               </a:rPr>
               <a:t>— JTable 配合自定义表格模型</a:t>
             </a:r>
+            <a:endParaRPr sz="1150" b="0">
+              <a:solidFill>
+                <a:srgbClr val="444444"/>
+              </a:solidFill>
+              <a:latin typeface="微软雅黑" panose="020B0503020204020204" charset="-122"/>
+              <a:ea typeface="微软雅黑" panose="020B0503020204020204" charset="-122"/>
+              <a:cs typeface="微软雅黑" panose="020B0503020204020204" charset="-122"/>
+            </a:endParaRPr>
           </a:p>
         </p:txBody>
       </p:sp>
@@ -6743,12 +7292,20 @@
                 <a:solidFill>
                   <a:srgbClr val="444444"/>
                 </a:solidFill>
-                <a:latin typeface="微软雅黑"/>
-                <a:ea typeface="微软雅黑"/>
-                <a:cs typeface="微软雅黑"/>
+                <a:latin typeface="微软雅黑" panose="020B0503020204020204" charset="-122"/>
+                <a:ea typeface="微软雅黑" panose="020B0503020204020204" charset="-122"/>
+                <a:cs typeface="微软雅黑" panose="020B0503020204020204" charset="-122"/>
               </a:rPr>
               <a:t>— 监听单元格变化，实时算盈亏</a:t>
             </a:r>
+            <a:endParaRPr sz="1150" b="0">
+              <a:solidFill>
+                <a:srgbClr val="444444"/>
+              </a:solidFill>
+              <a:latin typeface="微软雅黑" panose="020B0503020204020204" charset="-122"/>
+              <a:ea typeface="微软雅黑" panose="020B0503020204020204" charset="-122"/>
+              <a:cs typeface="微软雅黑" panose="020B0503020204020204" charset="-122"/>
+            </a:endParaRPr>
           </a:p>
         </p:txBody>
       </p:sp>
@@ -6784,12 +7341,20 @@
                 <a:solidFill>
                   <a:srgbClr val="444444"/>
                 </a:solidFill>
-                <a:latin typeface="微软雅黑"/>
-                <a:ea typeface="微软雅黑"/>
-                <a:cs typeface="微软雅黑"/>
+                <a:latin typeface="微软雅黑" panose="020B0503020204020204" charset="-122"/>
+                <a:ea typeface="微软雅黑" panose="020B0503020204020204" charset="-122"/>
+                <a:cs typeface="微软雅黑" panose="020B0503020204020204" charset="-122"/>
               </a:rPr>
               <a:t>— 手工事务批量提交</a:t>
             </a:r>
+            <a:endParaRPr sz="1150" b="0">
+              <a:solidFill>
+                <a:srgbClr val="444444"/>
+              </a:solidFill>
+              <a:latin typeface="微软雅黑" panose="020B0503020204020204" charset="-122"/>
+              <a:ea typeface="微软雅黑" panose="020B0503020204020204" charset="-122"/>
+              <a:cs typeface="微软雅黑" panose="020B0503020204020204" charset="-122"/>
+            </a:endParaRPr>
           </a:p>
         </p:txBody>
       </p:sp>
@@ -6825,15 +7390,47 @@
                 <a:solidFill>
                   <a:srgbClr val="444444"/>
                 </a:solidFill>
-                <a:latin typeface="微软雅黑"/>
-                <a:ea typeface="微软雅黑"/>
-                <a:cs typeface="微软雅黑"/>
+                <a:latin typeface="微软雅黑" panose="020B0503020204020204" charset="-122"/>
+                <a:ea typeface="微软雅黑" panose="020B0503020204020204" charset="-122"/>
+                <a:cs typeface="微软雅黑" panose="020B0503020204020204" charset="-122"/>
               </a:rPr>
               <a:t>— 异常时忽略非法输入</a:t>
             </a:r>
-          </a:p>
-        </p:txBody>
-      </p:sp>
+            <a:endParaRPr sz="1150" b="0">
+              <a:solidFill>
+                <a:srgbClr val="444444"/>
+              </a:solidFill>
+              <a:latin typeface="微软雅黑" panose="020B0503020204020204" charset="-122"/>
+              <a:ea typeface="微软雅黑" panose="020B0503020204020204" charset="-122"/>
+              <a:cs typeface="微软雅黑" panose="020B0503020204020204" charset="-122"/>
+            </a:endParaRPr>
+          </a:p>
+        </p:txBody>
+      </p:sp>
+      <p:pic>
+        <p:nvPicPr>
+          <p:cNvPr id="20" name="图片 19" descr="屏幕截图 2026-09-23 183424"/>
+          <p:cNvPicPr>
+            <a:picLocks noChangeAspect="1"/>
+          </p:cNvPicPr>
+          <p:nvPr/>
+        </p:nvPicPr>
+        <p:blipFill>
+          <a:blip r:embed="rId1"/>
+          <a:stretch>
+            <a:fillRect/>
+          </a:stretch>
+        </p:blipFill>
+        <p:spPr>
+          <a:xfrm>
+            <a:off x="1005840" y="1810385"/>
+            <a:ext cx="6674485" cy="4161155"/>
+          </a:xfrm>
+          <a:prstGeom prst="rect">
+            <a:avLst/>
+          </a:prstGeom>
+        </p:spPr>
+      </p:pic>
     </p:spTree>
   </p:cSld>
   <p:clrMapOvr>
@@ -6843,7 +7440,7 @@
 </file>
 
 <file path=ppt/slides/slide7.xml><?xml version="1.0" encoding="utf-8"?>
-<p:sld xmlns:a="http://schemas.openxmlformats.org/drawingml/2006/main" xmlns:p="http://schemas.openxmlformats.org/presentationml/2006/main" xmlns:r="http://schemas.openxmlformats.org/officeDocument/2006/relationships">
+<p:sld xmlns:a="http://schemas.openxmlformats.org/drawingml/2006/main" xmlns:r="http://schemas.openxmlformats.org/officeDocument/2006/relationships" xmlns:p="http://schemas.openxmlformats.org/presentationml/2006/main">
   <p:cSld>
     <p:spTree>
       <p:nvGrpSpPr>
@@ -6884,12 +7481,20 @@
                 <a:solidFill>
                   <a:srgbClr val="1A1A1A"/>
                 </a:solidFill>
-                <a:latin typeface="微软雅黑"/>
-                <a:ea typeface="微软雅黑"/>
-                <a:cs typeface="微软雅黑"/>
+                <a:latin typeface="微软雅黑" panose="020B0503020204020204" charset="-122"/>
+                <a:ea typeface="微软雅黑" panose="020B0503020204020204" charset="-122"/>
+                <a:cs typeface="微软雅黑" panose="020B0503020204020204" charset="-122"/>
               </a:rPr>
               <a:t>模块演示 · 库存统计</a:t>
             </a:r>
+            <a:endParaRPr sz="2500" b="1">
+              <a:solidFill>
+                <a:srgbClr val="1A1A1A"/>
+              </a:solidFill>
+              <a:latin typeface="微软雅黑" panose="020B0503020204020204" charset="-122"/>
+              <a:ea typeface="微软雅黑" panose="020B0503020204020204" charset="-122"/>
+              <a:cs typeface="微软雅黑" panose="020B0503020204020204" charset="-122"/>
+            </a:endParaRPr>
           </a:p>
         </p:txBody>
       </p:sp>
@@ -6925,12 +7530,20 @@
                 <a:solidFill>
                   <a:srgbClr val="1F4E79"/>
                 </a:solidFill>
-                <a:latin typeface="微软雅黑"/>
-                <a:ea typeface="微软雅黑"/>
-                <a:cs typeface="微软雅黑"/>
+                <a:latin typeface="微软雅黑" panose="020B0503020204020204" charset="-122"/>
+                <a:ea typeface="微软雅黑" panose="020B0503020204020204" charset="-122"/>
+                <a:cs typeface="微软雅黑" panose="020B0503020204020204" charset="-122"/>
               </a:rPr>
               <a:t>负责人：黄雨轩</a:t>
             </a:r>
+            <a:endParaRPr sz="1300" b="1">
+              <a:solidFill>
+                <a:srgbClr val="1F4E79"/>
+              </a:solidFill>
+              <a:latin typeface="微软雅黑" panose="020B0503020204020204" charset="-122"/>
+              <a:ea typeface="微软雅黑" panose="020B0503020204020204" charset="-122"/>
+              <a:cs typeface="微软雅黑" panose="020B0503020204020204" charset="-122"/>
+            </a:endParaRPr>
           </a:p>
         </p:txBody>
       </p:sp>
@@ -7017,12 +7630,20 @@
                 <a:solidFill>
                   <a:srgbClr val="8A8A8A"/>
                 </a:solidFill>
-                <a:latin typeface="微软雅黑"/>
-                <a:ea typeface="微软雅黑"/>
-                <a:cs typeface="微软雅黑"/>
+                <a:latin typeface="微软雅黑" panose="020B0503020204020204" charset="-122"/>
+                <a:ea typeface="微软雅黑" panose="020B0503020204020204" charset="-122"/>
+                <a:cs typeface="微软雅黑" panose="020B0503020204020204" charset="-122"/>
               </a:rPr>
               <a:t>【 此处插入运行截图 】</a:t>
             </a:r>
+            <a:endParaRPr sz="1300" b="0">
+              <a:solidFill>
+                <a:srgbClr val="8A8A8A"/>
+              </a:solidFill>
+              <a:latin typeface="微软雅黑" panose="020B0503020204020204" charset="-122"/>
+              <a:ea typeface="微软雅黑" panose="020B0503020204020204" charset="-122"/>
+              <a:cs typeface="微软雅黑" panose="020B0503020204020204" charset="-122"/>
+            </a:endParaRPr>
           </a:p>
         </p:txBody>
       </p:sp>
@@ -7058,12 +7679,20 @@
                 <a:solidFill>
                   <a:srgbClr val="B0B0B0"/>
                 </a:solidFill>
-                <a:latin typeface="微软雅黑"/>
-                <a:ea typeface="微软雅黑"/>
-                <a:cs typeface="微软雅黑"/>
+                <a:latin typeface="微软雅黑" panose="020B0503020204020204" charset="-122"/>
+                <a:ea typeface="微软雅黑" panose="020B0503020204020204" charset="-122"/>
+                <a:cs typeface="微软雅黑" panose="020B0503020204020204" charset="-122"/>
               </a:rPr>
               <a:t>运行程序 → 演示该功能 → 截图粘贴到本区域</a:t>
             </a:r>
+            <a:endParaRPr sz="1050" b="0">
+              <a:solidFill>
+                <a:srgbClr val="B0B0B0"/>
+              </a:solidFill>
+              <a:latin typeface="微软雅黑" panose="020B0503020204020204" charset="-122"/>
+              <a:ea typeface="微软雅黑" panose="020B0503020204020204" charset="-122"/>
+              <a:cs typeface="微软雅黑" panose="020B0503020204020204" charset="-122"/>
+            </a:endParaRPr>
           </a:p>
         </p:txBody>
       </p:sp>
@@ -7099,12 +7728,20 @@
                 <a:solidFill>
                   <a:srgbClr val="1A1A1A"/>
                 </a:solidFill>
-                <a:latin typeface="微软雅黑"/>
-                <a:ea typeface="微软雅黑"/>
-                <a:cs typeface="微软雅黑"/>
+                <a:latin typeface="微软雅黑" panose="020B0503020204020204" charset="-122"/>
+                <a:ea typeface="微软雅黑" panose="020B0503020204020204" charset="-122"/>
+                <a:cs typeface="微软雅黑" panose="020B0503020204020204" charset="-122"/>
               </a:rPr>
               <a:t>功能要点</a:t>
             </a:r>
+            <a:endParaRPr sz="1350" b="1">
+              <a:solidFill>
+                <a:srgbClr val="1A1A1A"/>
+              </a:solidFill>
+              <a:latin typeface="微软雅黑" panose="020B0503020204020204" charset="-122"/>
+              <a:ea typeface="微软雅黑" panose="020B0503020204020204" charset="-122"/>
+              <a:cs typeface="微软雅黑" panose="020B0503020204020204" charset="-122"/>
+            </a:endParaRPr>
           </a:p>
         </p:txBody>
       </p:sp>
@@ -7161,12 +7798,20 @@
                 <a:solidFill>
                   <a:srgbClr val="444444"/>
                 </a:solidFill>
-                <a:latin typeface="微软雅黑"/>
-                <a:ea typeface="微软雅黑"/>
-                <a:cs typeface="微软雅黑"/>
+                <a:latin typeface="微软雅黑" panose="020B0503020204020204" charset="-122"/>
+                <a:ea typeface="微软雅黑" panose="020B0503020204020204" charset="-122"/>
+                <a:cs typeface="微软雅黑" panose="020B0503020204020204" charset="-122"/>
               </a:rPr>
               <a:t>— 统计本月进货总量</a:t>
             </a:r>
+            <a:endParaRPr sz="1150" b="0">
+              <a:solidFill>
+                <a:srgbClr val="444444"/>
+              </a:solidFill>
+              <a:latin typeface="微软雅黑" panose="020B0503020204020204" charset="-122"/>
+              <a:ea typeface="微软雅黑" panose="020B0503020204020204" charset="-122"/>
+              <a:cs typeface="微软雅黑" panose="020B0503020204020204" charset="-122"/>
+            </a:endParaRPr>
           </a:p>
         </p:txBody>
       </p:sp>
@@ -7202,12 +7847,20 @@
                 <a:solidFill>
                   <a:srgbClr val="444444"/>
                 </a:solidFill>
-                <a:latin typeface="微软雅黑"/>
-                <a:ea typeface="微软雅黑"/>
-                <a:cs typeface="微软雅黑"/>
+                <a:latin typeface="微软雅黑" panose="020B0503020204020204" charset="-122"/>
+                <a:ea typeface="微软雅黑" panose="020B0503020204020204" charset="-122"/>
+                <a:cs typeface="微软雅黑" panose="020B0503020204020204" charset="-122"/>
               </a:rPr>
               <a:t>— 统计本月销售总量</a:t>
             </a:r>
+            <a:endParaRPr sz="1150" b="0">
+              <a:solidFill>
+                <a:srgbClr val="444444"/>
+              </a:solidFill>
+              <a:latin typeface="微软雅黑" panose="020B0503020204020204" charset="-122"/>
+              <a:ea typeface="微软雅黑" panose="020B0503020204020204" charset="-122"/>
+              <a:cs typeface="微软雅黑" panose="020B0503020204020204" charset="-122"/>
+            </a:endParaRPr>
           </a:p>
         </p:txBody>
       </p:sp>
@@ -7243,12 +7896,20 @@
                 <a:solidFill>
                   <a:srgbClr val="444444"/>
                 </a:solidFill>
-                <a:latin typeface="微软雅黑"/>
-                <a:ea typeface="微软雅黑"/>
-                <a:cs typeface="微软雅黑"/>
+                <a:latin typeface="微软雅黑" panose="020B0503020204020204" charset="-122"/>
+                <a:ea typeface="微软雅黑" panose="020B0503020204020204" charset="-122"/>
+                <a:cs typeface="微软雅黑" panose="020B0503020204020204" charset="-122"/>
               </a:rPr>
               <a:t>— 结果实时展示在界面</a:t>
             </a:r>
+            <a:endParaRPr sz="1150" b="0">
+              <a:solidFill>
+                <a:srgbClr val="444444"/>
+              </a:solidFill>
+              <a:latin typeface="微软雅黑" panose="020B0503020204020204" charset="-122"/>
+              <a:ea typeface="微软雅黑" panose="020B0503020204020204" charset="-122"/>
+              <a:cs typeface="微软雅黑" panose="020B0503020204020204" charset="-122"/>
+            </a:endParaRPr>
           </a:p>
         </p:txBody>
       </p:sp>
@@ -7284,12 +7945,20 @@
                 <a:solidFill>
                   <a:srgbClr val="444444"/>
                 </a:solidFill>
-                <a:latin typeface="微软雅黑"/>
-                <a:ea typeface="微软雅黑"/>
-                <a:cs typeface="微软雅黑"/>
+                <a:latin typeface="微软雅黑" panose="020B0503020204020204" charset="-122"/>
+                <a:ea typeface="微软雅黑" panose="020B0503020204020204" charset="-122"/>
+                <a:cs typeface="微软雅黑" panose="020B0503020204020204" charset="-122"/>
               </a:rPr>
               <a:t>— 为库存决策提供依据</a:t>
             </a:r>
+            <a:endParaRPr sz="1150" b="0">
+              <a:solidFill>
+                <a:srgbClr val="444444"/>
+              </a:solidFill>
+              <a:latin typeface="微软雅黑" panose="020B0503020204020204" charset="-122"/>
+              <a:ea typeface="微软雅黑" panose="020B0503020204020204" charset="-122"/>
+              <a:cs typeface="微软雅黑" panose="020B0503020204020204" charset="-122"/>
+            </a:endParaRPr>
           </a:p>
         </p:txBody>
       </p:sp>
@@ -7325,12 +7994,20 @@
                 <a:solidFill>
                   <a:srgbClr val="1A1A1A"/>
                 </a:solidFill>
-                <a:latin typeface="微软雅黑"/>
-                <a:ea typeface="微软雅黑"/>
-                <a:cs typeface="微软雅黑"/>
+                <a:latin typeface="微软雅黑" panose="020B0503020204020204" charset="-122"/>
+                <a:ea typeface="微软雅黑" panose="020B0503020204020204" charset="-122"/>
+                <a:cs typeface="微软雅黑" panose="020B0503020204020204" charset="-122"/>
               </a:rPr>
               <a:t>关键技术</a:t>
             </a:r>
+            <a:endParaRPr sz="1350" b="1">
+              <a:solidFill>
+                <a:srgbClr val="1A1A1A"/>
+              </a:solidFill>
+              <a:latin typeface="微软雅黑" panose="020B0503020204020204" charset="-122"/>
+              <a:ea typeface="微软雅黑" panose="020B0503020204020204" charset="-122"/>
+              <a:cs typeface="微软雅黑" panose="020B0503020204020204" charset="-122"/>
+            </a:endParaRPr>
           </a:p>
         </p:txBody>
       </p:sp>
@@ -7387,12 +8064,20 @@
                 <a:solidFill>
                   <a:srgbClr val="444444"/>
                 </a:solidFill>
-                <a:latin typeface="微软雅黑"/>
-                <a:ea typeface="微软雅黑"/>
-                <a:cs typeface="微软雅黑"/>
+                <a:latin typeface="微软雅黑" panose="020B0503020204020204" charset="-122"/>
+                <a:ea typeface="微软雅黑" panose="020B0503020204020204" charset="-122"/>
+                <a:cs typeface="微软雅黑" panose="020B0503020204020204" charset="-122"/>
               </a:rPr>
               <a:t>— SQL 聚合查询，按时间条件筛选</a:t>
             </a:r>
+            <a:endParaRPr sz="1150" b="0">
+              <a:solidFill>
+                <a:srgbClr val="444444"/>
+              </a:solidFill>
+              <a:latin typeface="微软雅黑" panose="020B0503020204020204" charset="-122"/>
+              <a:ea typeface="微软雅黑" panose="020B0503020204020204" charset="-122"/>
+              <a:cs typeface="微软雅黑" panose="020B0503020204020204" charset="-122"/>
+            </a:endParaRPr>
           </a:p>
         </p:txBody>
       </p:sp>
@@ -7428,12 +8113,20 @@
                 <a:solidFill>
                   <a:srgbClr val="444444"/>
                 </a:solidFill>
-                <a:latin typeface="微软雅黑"/>
-                <a:ea typeface="微软雅黑"/>
-                <a:cs typeface="微软雅黑"/>
+                <a:latin typeface="微软雅黑" panose="020B0503020204020204" charset="-122"/>
+                <a:ea typeface="微软雅黑" panose="020B0503020204020204" charset="-122"/>
+                <a:cs typeface="微软雅黑" panose="020B0503020204020204" charset="-122"/>
               </a:rPr>
               <a:t>— 结果用 Map 封装返回</a:t>
             </a:r>
+            <a:endParaRPr sz="1150" b="0">
+              <a:solidFill>
+                <a:srgbClr val="444444"/>
+              </a:solidFill>
+              <a:latin typeface="微软雅黑" panose="020B0503020204020204" charset="-122"/>
+              <a:ea typeface="微软雅黑" panose="020B0503020204020204" charset="-122"/>
+              <a:cs typeface="微软雅黑" panose="020B0503020204020204" charset="-122"/>
+            </a:endParaRPr>
           </a:p>
         </p:txBody>
       </p:sp>
@@ -7469,12 +8162,20 @@
                 <a:solidFill>
                   <a:srgbClr val="444444"/>
                 </a:solidFill>
-                <a:latin typeface="微软雅黑"/>
-                <a:ea typeface="微软雅黑"/>
-                <a:cs typeface="微软雅黑"/>
+                <a:latin typeface="微软雅黑" panose="020B0503020204020204" charset="-122"/>
+                <a:ea typeface="微软雅黑" panose="020B0503020204020204" charset="-122"/>
+                <a:cs typeface="微软雅黑" panose="020B0503020204020204" charset="-122"/>
               </a:rPr>
               <a:t>— 按钮触发 → 调用数据类 → 刷新显示</a:t>
             </a:r>
+            <a:endParaRPr sz="1150" b="0">
+              <a:solidFill>
+                <a:srgbClr val="444444"/>
+              </a:solidFill>
+              <a:latin typeface="微软雅黑" panose="020B0503020204020204" charset="-122"/>
+              <a:ea typeface="微软雅黑" panose="020B0503020204020204" charset="-122"/>
+              <a:cs typeface="微软雅黑" panose="020B0503020204020204" charset="-122"/>
+            </a:endParaRPr>
           </a:p>
         </p:txBody>
       </p:sp>
@@ -7510,15 +8211,47 @@
                 <a:solidFill>
                   <a:srgbClr val="444444"/>
                 </a:solidFill>
-                <a:latin typeface="微软雅黑"/>
-                <a:ea typeface="微软雅黑"/>
-                <a:cs typeface="微软雅黑"/>
+                <a:latin typeface="微软雅黑" panose="020B0503020204020204" charset="-122"/>
+                <a:ea typeface="微软雅黑" panose="020B0503020204020204" charset="-122"/>
+                <a:cs typeface="微软雅黑" panose="020B0503020204020204" charset="-122"/>
               </a:rPr>
               <a:t>— 数据访问与界面展示分离</a:t>
             </a:r>
-          </a:p>
-        </p:txBody>
-      </p:sp>
+            <a:endParaRPr sz="1150" b="0">
+              <a:solidFill>
+                <a:srgbClr val="444444"/>
+              </a:solidFill>
+              <a:latin typeface="微软雅黑" panose="020B0503020204020204" charset="-122"/>
+              <a:ea typeface="微软雅黑" panose="020B0503020204020204" charset="-122"/>
+              <a:cs typeface="微软雅黑" panose="020B0503020204020204" charset="-122"/>
+            </a:endParaRPr>
+          </a:p>
+        </p:txBody>
+      </p:sp>
+      <p:pic>
+        <p:nvPicPr>
+          <p:cNvPr id="20" name="图片 19" descr="屏幕截图 2026-09-23 183440"/>
+          <p:cNvPicPr>
+            <a:picLocks noChangeAspect="1"/>
+          </p:cNvPicPr>
+          <p:nvPr/>
+        </p:nvPicPr>
+        <p:blipFill>
+          <a:blip r:embed="rId1"/>
+          <a:stretch>
+            <a:fillRect/>
+          </a:stretch>
+        </p:blipFill>
+        <p:spPr>
+          <a:xfrm>
+            <a:off x="1005840" y="1810385"/>
+            <a:ext cx="6675120" cy="4160520"/>
+          </a:xfrm>
+          <a:prstGeom prst="rect">
+            <a:avLst/>
+          </a:prstGeom>
+        </p:spPr>
+      </p:pic>
     </p:spTree>
   </p:cSld>
   <p:clrMapOvr>
@@ -7528,7 +8261,7 @@
 </file>
 
 <file path=ppt/slides/slide8.xml><?xml version="1.0" encoding="utf-8"?>
-<p:sld xmlns:a="http://schemas.openxmlformats.org/drawingml/2006/main" xmlns:p="http://schemas.openxmlformats.org/presentationml/2006/main" xmlns:r="http://schemas.openxmlformats.org/officeDocument/2006/relationships">
+<p:sld xmlns:a="http://schemas.openxmlformats.org/drawingml/2006/main" xmlns:r="http://schemas.openxmlformats.org/officeDocument/2006/relationships" xmlns:p="http://schemas.openxmlformats.org/presentationml/2006/main">
   <p:cSld>
     <p:spTree>
       <p:nvGrpSpPr>
@@ -7569,12 +8302,20 @@
                 <a:solidFill>
                   <a:srgbClr val="1A1A1A"/>
                 </a:solidFill>
-                <a:latin typeface="微软雅黑"/>
-                <a:ea typeface="微软雅黑"/>
-                <a:cs typeface="微软雅黑"/>
+                <a:latin typeface="微软雅黑" panose="020B0503020204020204" charset="-122"/>
+                <a:ea typeface="微软雅黑" panose="020B0503020204020204" charset="-122"/>
+                <a:cs typeface="微软雅黑" panose="020B0503020204020204" charset="-122"/>
               </a:rPr>
               <a:t>模块演示 · 数据库备份与恢复</a:t>
             </a:r>
+            <a:endParaRPr sz="2500" b="1">
+              <a:solidFill>
+                <a:srgbClr val="1A1A1A"/>
+              </a:solidFill>
+              <a:latin typeface="微软雅黑" panose="020B0503020204020204" charset="-122"/>
+              <a:ea typeface="微软雅黑" panose="020B0503020204020204" charset="-122"/>
+              <a:cs typeface="微软雅黑" panose="020B0503020204020204" charset="-122"/>
+            </a:endParaRPr>
           </a:p>
         </p:txBody>
       </p:sp>
@@ -7610,12 +8351,20 @@
                 <a:solidFill>
                   <a:srgbClr val="1F4E79"/>
                 </a:solidFill>
-                <a:latin typeface="微软雅黑"/>
-                <a:ea typeface="微软雅黑"/>
-                <a:cs typeface="微软雅黑"/>
+                <a:latin typeface="微软雅黑" panose="020B0503020204020204" charset="-122"/>
+                <a:ea typeface="微软雅黑" panose="020B0503020204020204" charset="-122"/>
+                <a:cs typeface="微软雅黑" panose="020B0503020204020204" charset="-122"/>
               </a:rPr>
               <a:t>负责人：钱昊</a:t>
             </a:r>
+            <a:endParaRPr sz="1300" b="1">
+              <a:solidFill>
+                <a:srgbClr val="1F4E79"/>
+              </a:solidFill>
+              <a:latin typeface="微软雅黑" panose="020B0503020204020204" charset="-122"/>
+              <a:ea typeface="微软雅黑" panose="020B0503020204020204" charset="-122"/>
+              <a:cs typeface="微软雅黑" panose="020B0503020204020204" charset="-122"/>
+            </a:endParaRPr>
           </a:p>
         </p:txBody>
       </p:sp>
@@ -7702,12 +8451,20 @@
                 <a:solidFill>
                   <a:srgbClr val="8A8A8A"/>
                 </a:solidFill>
-                <a:latin typeface="微软雅黑"/>
-                <a:ea typeface="微软雅黑"/>
-                <a:cs typeface="微软雅黑"/>
+                <a:latin typeface="微软雅黑" panose="020B0503020204020204" charset="-122"/>
+                <a:ea typeface="微软雅黑" panose="020B0503020204020204" charset="-122"/>
+                <a:cs typeface="微软雅黑" panose="020B0503020204020204" charset="-122"/>
               </a:rPr>
               <a:t>【 此处插入运行截图 】</a:t>
             </a:r>
+            <a:endParaRPr sz="1300" b="0">
+              <a:solidFill>
+                <a:srgbClr val="8A8A8A"/>
+              </a:solidFill>
+              <a:latin typeface="微软雅黑" panose="020B0503020204020204" charset="-122"/>
+              <a:ea typeface="微软雅黑" panose="020B0503020204020204" charset="-122"/>
+              <a:cs typeface="微软雅黑" panose="020B0503020204020204" charset="-122"/>
+            </a:endParaRPr>
           </a:p>
         </p:txBody>
       </p:sp>
@@ -7743,12 +8500,20 @@
                 <a:solidFill>
                   <a:srgbClr val="B0B0B0"/>
                 </a:solidFill>
-                <a:latin typeface="微软雅黑"/>
-                <a:ea typeface="微软雅黑"/>
-                <a:cs typeface="微软雅黑"/>
+                <a:latin typeface="微软雅黑" panose="020B0503020204020204" charset="-122"/>
+                <a:ea typeface="微软雅黑" panose="020B0503020204020204" charset="-122"/>
+                <a:cs typeface="微软雅黑" panose="020B0503020204020204" charset="-122"/>
               </a:rPr>
               <a:t>运行程序 → 演示该功能 → 截图粘贴到本区域</a:t>
             </a:r>
+            <a:endParaRPr sz="1050" b="0">
+              <a:solidFill>
+                <a:srgbClr val="B0B0B0"/>
+              </a:solidFill>
+              <a:latin typeface="微软雅黑" panose="020B0503020204020204" charset="-122"/>
+              <a:ea typeface="微软雅黑" panose="020B0503020204020204" charset="-122"/>
+              <a:cs typeface="微软雅黑" panose="020B0503020204020204" charset="-122"/>
+            </a:endParaRPr>
           </a:p>
         </p:txBody>
       </p:sp>
@@ -7784,12 +8549,20 @@
                 <a:solidFill>
                   <a:srgbClr val="1A1A1A"/>
                 </a:solidFill>
-                <a:latin typeface="微软雅黑"/>
-                <a:ea typeface="微软雅黑"/>
-                <a:cs typeface="微软雅黑"/>
+                <a:latin typeface="微软雅黑" panose="020B0503020204020204" charset="-122"/>
+                <a:ea typeface="微软雅黑" panose="020B0503020204020204" charset="-122"/>
+                <a:cs typeface="微软雅黑" panose="020B0503020204020204" charset="-122"/>
               </a:rPr>
               <a:t>功能要点</a:t>
             </a:r>
+            <a:endParaRPr sz="1350" b="1">
+              <a:solidFill>
+                <a:srgbClr val="1A1A1A"/>
+              </a:solidFill>
+              <a:latin typeface="微软雅黑" panose="020B0503020204020204" charset="-122"/>
+              <a:ea typeface="微软雅黑" panose="020B0503020204020204" charset="-122"/>
+              <a:cs typeface="微软雅黑" panose="020B0503020204020204" charset="-122"/>
+            </a:endParaRPr>
           </a:p>
         </p:txBody>
       </p:sp>
@@ -7846,12 +8619,20 @@
                 <a:solidFill>
                   <a:srgbClr val="444444"/>
                 </a:solidFill>
-                <a:latin typeface="微软雅黑"/>
-                <a:ea typeface="微软雅黑"/>
-                <a:cs typeface="微软雅黑"/>
+                <a:latin typeface="微软雅黑" panose="020B0503020204020204" charset="-122"/>
+                <a:ea typeface="微软雅黑" panose="020B0503020204020204" charset="-122"/>
+                <a:cs typeface="微软雅黑" panose="020B0503020204020204" charset="-122"/>
               </a:rPr>
               <a:t>— 一键备份数据库到指定文件</a:t>
             </a:r>
+            <a:endParaRPr sz="1150" b="0">
+              <a:solidFill>
+                <a:srgbClr val="444444"/>
+              </a:solidFill>
+              <a:latin typeface="微软雅黑" panose="020B0503020204020204" charset="-122"/>
+              <a:ea typeface="微软雅黑" panose="020B0503020204020204" charset="-122"/>
+              <a:cs typeface="微软雅黑" panose="020B0503020204020204" charset="-122"/>
+            </a:endParaRPr>
           </a:p>
         </p:txBody>
       </p:sp>
@@ -7887,12 +8668,20 @@
                 <a:solidFill>
                   <a:srgbClr val="444444"/>
                 </a:solidFill>
-                <a:latin typeface="微软雅黑"/>
-                <a:ea typeface="微软雅黑"/>
-                <a:cs typeface="微软雅黑"/>
+                <a:latin typeface="微软雅黑" panose="020B0503020204020204" charset="-122"/>
+                <a:ea typeface="微软雅黑" panose="020B0503020204020204" charset="-122"/>
+                <a:cs typeface="微软雅黑" panose="020B0503020204020204" charset="-122"/>
               </a:rPr>
               <a:t>— 从备份文件恢复数据库</a:t>
             </a:r>
+            <a:endParaRPr sz="1150" b="0">
+              <a:solidFill>
+                <a:srgbClr val="444444"/>
+              </a:solidFill>
+              <a:latin typeface="微软雅黑" panose="020B0503020204020204" charset="-122"/>
+              <a:ea typeface="微软雅黑" panose="020B0503020204020204" charset="-122"/>
+              <a:cs typeface="微软雅黑" panose="020B0503020204020204" charset="-122"/>
+            </a:endParaRPr>
           </a:p>
         </p:txBody>
       </p:sp>
@@ -7928,12 +8717,20 @@
                 <a:solidFill>
                   <a:srgbClr val="444444"/>
                 </a:solidFill>
-                <a:latin typeface="微软雅黑"/>
-                <a:ea typeface="微软雅黑"/>
-                <a:cs typeface="微软雅黑"/>
+                <a:latin typeface="微软雅黑" panose="020B0503020204020204" charset="-122"/>
+                <a:ea typeface="微软雅黑" panose="020B0503020204020204" charset="-122"/>
+                <a:cs typeface="微软雅黑" panose="020B0503020204020204" charset="-122"/>
               </a:rPr>
               <a:t>— 进度条实时反馈进度</a:t>
             </a:r>
+            <a:endParaRPr sz="1150" b="0">
+              <a:solidFill>
+                <a:srgbClr val="444444"/>
+              </a:solidFill>
+              <a:latin typeface="微软雅黑" panose="020B0503020204020204" charset="-122"/>
+              <a:ea typeface="微软雅黑" panose="020B0503020204020204" charset="-122"/>
+              <a:cs typeface="微软雅黑" panose="020B0503020204020204" charset="-122"/>
+            </a:endParaRPr>
           </a:p>
         </p:txBody>
       </p:sp>
@@ -7969,12 +8766,20 @@
                 <a:solidFill>
                   <a:srgbClr val="444444"/>
                 </a:solidFill>
-                <a:latin typeface="微软雅黑"/>
-                <a:ea typeface="微软雅黑"/>
-                <a:cs typeface="微软雅黑"/>
+                <a:latin typeface="微软雅黑" panose="020B0503020204020204" charset="-122"/>
+                <a:ea typeface="微软雅黑" panose="020B0503020204020204" charset="-122"/>
+                <a:cs typeface="微软雅黑" panose="020B0503020204020204" charset="-122"/>
               </a:rPr>
               <a:t>— 避免误操作造成数据丢失</a:t>
             </a:r>
+            <a:endParaRPr sz="1150" b="0">
+              <a:solidFill>
+                <a:srgbClr val="444444"/>
+              </a:solidFill>
+              <a:latin typeface="微软雅黑" panose="020B0503020204020204" charset="-122"/>
+              <a:ea typeface="微软雅黑" panose="020B0503020204020204" charset="-122"/>
+              <a:cs typeface="微软雅黑" panose="020B0503020204020204" charset="-122"/>
+            </a:endParaRPr>
           </a:p>
         </p:txBody>
       </p:sp>
@@ -8010,12 +8815,20 @@
                 <a:solidFill>
                   <a:srgbClr val="1A1A1A"/>
                 </a:solidFill>
-                <a:latin typeface="微软雅黑"/>
-                <a:ea typeface="微软雅黑"/>
-                <a:cs typeface="微软雅黑"/>
+                <a:latin typeface="微软雅黑" panose="020B0503020204020204" charset="-122"/>
+                <a:ea typeface="微软雅黑" panose="020B0503020204020204" charset="-122"/>
+                <a:cs typeface="微软雅黑" panose="020B0503020204020204" charset="-122"/>
               </a:rPr>
               <a:t>关键技术</a:t>
             </a:r>
+            <a:endParaRPr sz="1350" b="1">
+              <a:solidFill>
+                <a:srgbClr val="1A1A1A"/>
+              </a:solidFill>
+              <a:latin typeface="微软雅黑" panose="020B0503020204020204" charset="-122"/>
+              <a:ea typeface="微软雅黑" panose="020B0503020204020204" charset="-122"/>
+              <a:cs typeface="微软雅黑" panose="020B0503020204020204" charset="-122"/>
+            </a:endParaRPr>
           </a:p>
         </p:txBody>
       </p:sp>
@@ -8072,12 +8885,20 @@
                 <a:solidFill>
                   <a:srgbClr val="444444"/>
                 </a:solidFill>
-                <a:latin typeface="微软雅黑"/>
-                <a:ea typeface="微软雅黑"/>
-                <a:cs typeface="微软雅黑"/>
+                <a:latin typeface="微软雅黑" panose="020B0503020204020204" charset="-122"/>
+                <a:ea typeface="微软雅黑" panose="020B0503020204020204" charset="-122"/>
+                <a:cs typeface="微软雅黑" panose="020B0503020204020204" charset="-122"/>
               </a:rPr>
               <a:t>— 另开线程执行，界面不卡顿</a:t>
             </a:r>
+            <a:endParaRPr sz="1150" b="0">
+              <a:solidFill>
+                <a:srgbClr val="444444"/>
+              </a:solidFill>
+              <a:latin typeface="微软雅黑" panose="020B0503020204020204" charset="-122"/>
+              <a:ea typeface="微软雅黑" panose="020B0503020204020204" charset="-122"/>
+              <a:cs typeface="微软雅黑" panose="020B0503020204020204" charset="-122"/>
+            </a:endParaRPr>
           </a:p>
         </p:txBody>
       </p:sp>
@@ -8113,12 +8934,20 @@
                 <a:solidFill>
                   <a:srgbClr val="444444"/>
                 </a:solidFill>
-                <a:latin typeface="微软雅黑"/>
-                <a:ea typeface="微软雅黑"/>
-                <a:cs typeface="微软雅黑"/>
+                <a:latin typeface="微软雅黑" panose="020B0503020204020204" charset="-122"/>
+                <a:ea typeface="微软雅黑" panose="020B0503020204020204" charset="-122"/>
+                <a:cs typeface="微软雅黑" panose="020B0503020204020204" charset="-122"/>
               </a:rPr>
               <a:t>— JProgressBar 显示进度</a:t>
             </a:r>
+            <a:endParaRPr sz="1150" b="0">
+              <a:solidFill>
+                <a:srgbClr val="444444"/>
+              </a:solidFill>
+              <a:latin typeface="微软雅黑" panose="020B0503020204020204" charset="-122"/>
+              <a:ea typeface="微软雅黑" panose="020B0503020204020204" charset="-122"/>
+              <a:cs typeface="微软雅黑" panose="020B0503020204020204" charset="-122"/>
+            </a:endParaRPr>
           </a:p>
         </p:txBody>
       </p:sp>
@@ -8154,12 +8983,20 @@
                 <a:solidFill>
                   <a:srgbClr val="444444"/>
                 </a:solidFill>
-                <a:latin typeface="微软雅黑"/>
-                <a:ea typeface="微软雅黑"/>
-                <a:cs typeface="微软雅黑"/>
+                <a:latin typeface="微软雅黑" panose="020B0503020204020204" charset="-122"/>
+                <a:ea typeface="微软雅黑" panose="020B0503020204020204" charset="-122"/>
+                <a:cs typeface="微软雅黑" panose="020B0503020204020204" charset="-122"/>
               </a:rPr>
               <a:t>— 备份与恢复封装在工具类中</a:t>
             </a:r>
+            <a:endParaRPr sz="1150" b="0">
+              <a:solidFill>
+                <a:srgbClr val="444444"/>
+              </a:solidFill>
+              <a:latin typeface="微软雅黑" panose="020B0503020204020204" charset="-122"/>
+              <a:ea typeface="微软雅黑" panose="020B0503020204020204" charset="-122"/>
+              <a:cs typeface="微软雅黑" panose="020B0503020204020204" charset="-122"/>
+            </a:endParaRPr>
           </a:p>
         </p:txBody>
       </p:sp>
@@ -8195,15 +9032,47 @@
                 <a:solidFill>
                   <a:srgbClr val="444444"/>
                 </a:solidFill>
-                <a:latin typeface="微软雅黑"/>
-                <a:ea typeface="微软雅黑"/>
-                <a:cs typeface="微软雅黑"/>
+                <a:latin typeface="微软雅黑" panose="020B0503020204020204" charset="-122"/>
+                <a:ea typeface="微软雅黑" panose="020B0503020204020204" charset="-122"/>
+                <a:cs typeface="微软雅黑" panose="020B0503020204020204" charset="-122"/>
               </a:rPr>
               <a:t>— 备份到 c:/cangchu_backup.sql</a:t>
             </a:r>
-          </a:p>
-        </p:txBody>
-      </p:sp>
+            <a:endParaRPr sz="1150" b="0">
+              <a:solidFill>
+                <a:srgbClr val="444444"/>
+              </a:solidFill>
+              <a:latin typeface="微软雅黑" panose="020B0503020204020204" charset="-122"/>
+              <a:ea typeface="微软雅黑" panose="020B0503020204020204" charset="-122"/>
+              <a:cs typeface="微软雅黑" panose="020B0503020204020204" charset="-122"/>
+            </a:endParaRPr>
+          </a:p>
+        </p:txBody>
+      </p:sp>
+      <p:pic>
+        <p:nvPicPr>
+          <p:cNvPr id="20" name="图片 19" descr="屏幕截图 2026-09-23 202851"/>
+          <p:cNvPicPr>
+            <a:picLocks noChangeAspect="1"/>
+          </p:cNvPicPr>
+          <p:nvPr/>
+        </p:nvPicPr>
+        <p:blipFill>
+          <a:blip r:embed="rId1"/>
+          <a:stretch>
+            <a:fillRect/>
+          </a:stretch>
+        </p:blipFill>
+        <p:spPr>
+          <a:xfrm>
+            <a:off x="1005840" y="1810385"/>
+            <a:ext cx="6675120" cy="4161155"/>
+          </a:xfrm>
+          <a:prstGeom prst="rect">
+            <a:avLst/>
+          </a:prstGeom>
+        </p:spPr>
+      </p:pic>
     </p:spTree>
   </p:cSld>
   <p:clrMapOvr>
@@ -8213,7 +9082,7 @@
 </file>
 
 <file path=ppt/slides/slide9.xml><?xml version="1.0" encoding="utf-8"?>
-<p:sld xmlns:a="http://schemas.openxmlformats.org/drawingml/2006/main" xmlns:p="http://schemas.openxmlformats.org/presentationml/2006/main" xmlns:r="http://schemas.openxmlformats.org/officeDocument/2006/relationships">
+<p:sld xmlns:a="http://schemas.openxmlformats.org/drawingml/2006/main" xmlns:r="http://schemas.openxmlformats.org/officeDocument/2006/relationships" xmlns:p="http://schemas.openxmlformats.org/presentationml/2006/main">
   <p:cSld>
     <p:spTree>
       <p:nvGrpSpPr>
@@ -8254,12 +9123,20 @@
                 <a:solidFill>
                   <a:srgbClr val="1A1A1A"/>
                 </a:solidFill>
-                <a:latin typeface="微软雅黑"/>
-                <a:ea typeface="微软雅黑"/>
-                <a:cs typeface="微软雅黑"/>
+                <a:latin typeface="微软雅黑" panose="020B0503020204020204" charset="-122"/>
+                <a:ea typeface="微软雅黑" panose="020B0503020204020204" charset="-122"/>
+                <a:cs typeface="微软雅黑" panose="020B0503020204020204" charset="-122"/>
               </a:rPr>
               <a:t>团队分工与系统亮点</a:t>
             </a:r>
+            <a:endParaRPr sz="2500" b="1">
+              <a:solidFill>
+                <a:srgbClr val="1A1A1A"/>
+              </a:solidFill>
+              <a:latin typeface="微软雅黑" panose="020B0503020204020204" charset="-122"/>
+              <a:ea typeface="微软雅黑" panose="020B0503020204020204" charset="-122"/>
+              <a:cs typeface="微软雅黑" panose="020B0503020204020204" charset="-122"/>
+            </a:endParaRPr>
           </a:p>
         </p:txBody>
       </p:sp>
@@ -8316,12 +9193,20 @@
                 <a:solidFill>
                   <a:srgbClr val="8A8A8A"/>
                 </a:solidFill>
-                <a:latin typeface="微软雅黑"/>
-                <a:ea typeface="微软雅黑"/>
-                <a:cs typeface="微软雅黑"/>
+                <a:latin typeface="微软雅黑" panose="020B0503020204020204" charset="-122"/>
+                <a:ea typeface="微软雅黑" panose="020B0503020204020204" charset="-122"/>
+                <a:cs typeface="微软雅黑" panose="020B0503020204020204" charset="-122"/>
               </a:rPr>
               <a:t>成员</a:t>
             </a:r>
+            <a:endParaRPr sz="1150" b="1">
+              <a:solidFill>
+                <a:srgbClr val="8A8A8A"/>
+              </a:solidFill>
+              <a:latin typeface="微软雅黑" panose="020B0503020204020204" charset="-122"/>
+              <a:ea typeface="微软雅黑" panose="020B0503020204020204" charset="-122"/>
+              <a:cs typeface="微软雅黑" panose="020B0503020204020204" charset="-122"/>
+            </a:endParaRPr>
           </a:p>
         </p:txBody>
       </p:sp>
@@ -8357,12 +9242,20 @@
                 <a:solidFill>
                   <a:srgbClr val="8A8A8A"/>
                 </a:solidFill>
-                <a:latin typeface="微软雅黑"/>
-                <a:ea typeface="微软雅黑"/>
-                <a:cs typeface="微软雅黑"/>
+                <a:latin typeface="微软雅黑" panose="020B0503020204020204" charset="-122"/>
+                <a:ea typeface="微软雅黑" panose="020B0503020204020204" charset="-122"/>
+                <a:cs typeface="微软雅黑" panose="020B0503020204020204" charset="-122"/>
               </a:rPr>
               <a:t>负责模块</a:t>
             </a:r>
+            <a:endParaRPr sz="1150" b="1">
+              <a:solidFill>
+                <a:srgbClr val="8A8A8A"/>
+              </a:solidFill>
+              <a:latin typeface="微软雅黑" panose="020B0503020204020204" charset="-122"/>
+              <a:ea typeface="微软雅黑" panose="020B0503020204020204" charset="-122"/>
+              <a:cs typeface="微软雅黑" panose="020B0503020204020204" charset="-122"/>
+            </a:endParaRPr>
           </a:p>
         </p:txBody>
       </p:sp>
@@ -8398,12 +9291,20 @@
                 <a:solidFill>
                   <a:srgbClr val="8A8A8A"/>
                 </a:solidFill>
-                <a:latin typeface="微软雅黑"/>
-                <a:ea typeface="微软雅黑"/>
-                <a:cs typeface="微软雅黑"/>
+                <a:latin typeface="微软雅黑" panose="020B0503020204020204" charset="-122"/>
+                <a:ea typeface="微软雅黑" panose="020B0503020204020204" charset="-122"/>
+                <a:cs typeface="微软雅黑" panose="020B0503020204020204" charset="-122"/>
               </a:rPr>
               <a:t>代码量</a:t>
             </a:r>
+            <a:endParaRPr sz="1150" b="1">
+              <a:solidFill>
+                <a:srgbClr val="8A8A8A"/>
+              </a:solidFill>
+              <a:latin typeface="微软雅黑" panose="020B0503020204020204" charset="-122"/>
+              <a:ea typeface="微软雅黑" panose="020B0503020204020204" charset="-122"/>
+              <a:cs typeface="微软雅黑" panose="020B0503020204020204" charset="-122"/>
+            </a:endParaRPr>
           </a:p>
         </p:txBody>
       </p:sp>
@@ -8460,12 +9361,20 @@
                 <a:solidFill>
                   <a:srgbClr val="1A1A1A"/>
                 </a:solidFill>
-                <a:latin typeface="微软雅黑"/>
-                <a:ea typeface="微软雅黑"/>
-                <a:cs typeface="微软雅黑"/>
+                <a:latin typeface="微软雅黑" panose="020B0503020204020204" charset="-122"/>
+                <a:ea typeface="微软雅黑" panose="020B0503020204020204" charset="-122"/>
+                <a:cs typeface="微软雅黑" panose="020B0503020204020204" charset="-122"/>
               </a:rPr>
               <a:t>钱昊（组长）</a:t>
             </a:r>
+            <a:endParaRPr sz="1350" b="1">
+              <a:solidFill>
+                <a:srgbClr val="1A1A1A"/>
+              </a:solidFill>
+              <a:latin typeface="微软雅黑" panose="020B0503020204020204" charset="-122"/>
+              <a:ea typeface="微软雅黑" panose="020B0503020204020204" charset="-122"/>
+              <a:cs typeface="微软雅黑" panose="020B0503020204020204" charset="-122"/>
+            </a:endParaRPr>
           </a:p>
         </p:txBody>
       </p:sp>
@@ -8501,12 +9410,20 @@
                 <a:solidFill>
                   <a:srgbClr val="444444"/>
                 </a:solidFill>
-                <a:latin typeface="微软雅黑"/>
-                <a:ea typeface="微软雅黑"/>
-                <a:cs typeface="微软雅黑"/>
+                <a:latin typeface="微软雅黑" panose="020B0503020204020204" charset="-122"/>
+                <a:ea typeface="微软雅黑" panose="020B0503020204020204" charset="-122"/>
+                <a:cs typeface="微软雅黑" panose="020B0503020204020204" charset="-122"/>
               </a:rPr>
               <a:t>公共支撑层 · 数据库备份与恢复</a:t>
             </a:r>
+            <a:endParaRPr sz="1200" b="0">
+              <a:solidFill>
+                <a:srgbClr val="444444"/>
+              </a:solidFill>
+              <a:latin typeface="微软雅黑" panose="020B0503020204020204" charset="-122"/>
+              <a:ea typeface="微软雅黑" panose="020B0503020204020204" charset="-122"/>
+              <a:cs typeface="微软雅黑" panose="020B0503020204020204" charset="-122"/>
+            </a:endParaRPr>
           </a:p>
         </p:txBody>
       </p:sp>
@@ -8542,12 +9459,20 @@
                 <a:solidFill>
                   <a:srgbClr val="444444"/>
                 </a:solidFill>
-                <a:latin typeface="微软雅黑"/>
-                <a:ea typeface="微软雅黑"/>
-                <a:cs typeface="微软雅黑"/>
+                <a:latin typeface="微软雅黑" panose="020B0503020204020204" charset="-122"/>
+                <a:ea typeface="微软雅黑" panose="020B0503020204020204" charset="-122"/>
+                <a:cs typeface="微软雅黑" panose="020B0503020204020204" charset="-122"/>
               </a:rPr>
               <a:t>约 320 行</a:t>
             </a:r>
+            <a:endParaRPr sz="1200" b="0">
+              <a:solidFill>
+                <a:srgbClr val="444444"/>
+              </a:solidFill>
+              <a:latin typeface="微软雅黑" panose="020B0503020204020204" charset="-122"/>
+              <a:ea typeface="微软雅黑" panose="020B0503020204020204" charset="-122"/>
+              <a:cs typeface="微软雅黑" panose="020B0503020204020204" charset="-122"/>
+            </a:endParaRPr>
           </a:p>
         </p:txBody>
       </p:sp>
@@ -8604,12 +9529,20 @@
                 <a:solidFill>
                   <a:srgbClr val="1A1A1A"/>
                 </a:solidFill>
-                <a:latin typeface="微软雅黑"/>
-                <a:ea typeface="微软雅黑"/>
-                <a:cs typeface="微软雅黑"/>
+                <a:latin typeface="微软雅黑" panose="020B0503020204020204" charset="-122"/>
+                <a:ea typeface="微软雅黑" panose="020B0503020204020204" charset="-122"/>
+                <a:cs typeface="微软雅黑" panose="020B0503020204020204" charset="-122"/>
               </a:rPr>
               <a:t>黄雨轩</a:t>
             </a:r>
+            <a:endParaRPr sz="1350" b="1">
+              <a:solidFill>
+                <a:srgbClr val="1A1A1A"/>
+              </a:solidFill>
+              <a:latin typeface="微软雅黑" panose="020B0503020204020204" charset="-122"/>
+              <a:ea typeface="微软雅黑" panose="020B0503020204020204" charset="-122"/>
+              <a:cs typeface="微软雅黑" panose="020B0503020204020204" charset="-122"/>
+            </a:endParaRPr>
           </a:p>
         </p:txBody>
       </p:sp>
@@ -8645,12 +9578,20 @@
                 <a:solidFill>
                   <a:srgbClr val="444444"/>
                 </a:solidFill>
-                <a:latin typeface="微软雅黑"/>
-                <a:ea typeface="微软雅黑"/>
-                <a:cs typeface="微软雅黑"/>
+                <a:latin typeface="微软雅黑" panose="020B0503020204020204" charset="-122"/>
+                <a:ea typeface="微软雅黑" panose="020B0503020204020204" charset="-122"/>
+                <a:cs typeface="微软雅黑" panose="020B0503020204020204" charset="-122"/>
               </a:rPr>
               <a:t>进货单管理 · 库存统计</a:t>
             </a:r>
+            <a:endParaRPr sz="1200" b="0">
+              <a:solidFill>
+                <a:srgbClr val="444444"/>
+              </a:solidFill>
+              <a:latin typeface="微软雅黑" panose="020B0503020204020204" charset="-122"/>
+              <a:ea typeface="微软雅黑" panose="020B0503020204020204" charset="-122"/>
+              <a:cs typeface="微软雅黑" panose="020B0503020204020204" charset="-122"/>
+            </a:endParaRPr>
           </a:p>
         </p:txBody>
       </p:sp>
@@ -8686,12 +9627,20 @@
                 <a:solidFill>
                   <a:srgbClr val="444444"/>
                 </a:solidFill>
-                <a:latin typeface="微软雅黑"/>
-                <a:ea typeface="微软雅黑"/>
-                <a:cs typeface="微软雅黑"/>
+                <a:latin typeface="微软雅黑" panose="020B0503020204020204" charset="-122"/>
+                <a:ea typeface="微软雅黑" panose="020B0503020204020204" charset="-122"/>
+                <a:cs typeface="微软雅黑" panose="020B0503020204020204" charset="-122"/>
               </a:rPr>
               <a:t>约 412 行</a:t>
             </a:r>
+            <a:endParaRPr sz="1200" b="0">
+              <a:solidFill>
+                <a:srgbClr val="444444"/>
+              </a:solidFill>
+              <a:latin typeface="微软雅黑" panose="020B0503020204020204" charset="-122"/>
+              <a:ea typeface="微软雅黑" panose="020B0503020204020204" charset="-122"/>
+              <a:cs typeface="微软雅黑" panose="020B0503020204020204" charset="-122"/>
+            </a:endParaRPr>
           </a:p>
         </p:txBody>
       </p:sp>
@@ -8748,12 +9697,20 @@
                 <a:solidFill>
                   <a:srgbClr val="1A1A1A"/>
                 </a:solidFill>
-                <a:latin typeface="微软雅黑"/>
-                <a:ea typeface="微软雅黑"/>
-                <a:cs typeface="微软雅黑"/>
+                <a:latin typeface="微软雅黑" panose="020B0503020204020204" charset="-122"/>
+                <a:ea typeface="微软雅黑" panose="020B0503020204020204" charset="-122"/>
+                <a:cs typeface="微软雅黑" panose="020B0503020204020204" charset="-122"/>
               </a:rPr>
               <a:t>马俊浩</a:t>
             </a:r>
+            <a:endParaRPr sz="1350" b="1">
+              <a:solidFill>
+                <a:srgbClr val="1A1A1A"/>
+              </a:solidFill>
+              <a:latin typeface="微软雅黑" panose="020B0503020204020204" charset="-122"/>
+              <a:ea typeface="微软雅黑" panose="020B0503020204020204" charset="-122"/>
+              <a:cs typeface="微软雅黑" panose="020B0503020204020204" charset="-122"/>
+            </a:endParaRPr>
           </a:p>
         </p:txBody>
       </p:sp>
@@ -8789,12 +9746,20 @@
                 <a:solidFill>
                   <a:srgbClr val="444444"/>
                 </a:solidFill>
-                <a:latin typeface="微软雅黑"/>
-                <a:ea typeface="微软雅黑"/>
-                <a:cs typeface="微软雅黑"/>
+                <a:latin typeface="微软雅黑" panose="020B0503020204020204" charset="-122"/>
+                <a:ea typeface="微软雅黑" panose="020B0503020204020204" charset="-122"/>
+                <a:cs typeface="微软雅黑" panose="020B0503020204020204" charset="-122"/>
               </a:rPr>
               <a:t>销售单管理 · 库存盘点</a:t>
             </a:r>
+            <a:endParaRPr sz="1200" b="0">
+              <a:solidFill>
+                <a:srgbClr val="444444"/>
+              </a:solidFill>
+              <a:latin typeface="微软雅黑" panose="020B0503020204020204" charset="-122"/>
+              <a:ea typeface="微软雅黑" panose="020B0503020204020204" charset="-122"/>
+              <a:cs typeface="微软雅黑" panose="020B0503020204020204" charset="-122"/>
+            </a:endParaRPr>
           </a:p>
         </p:txBody>
       </p:sp>
@@ -8830,12 +9795,20 @@
                 <a:solidFill>
                   <a:srgbClr val="444444"/>
                 </a:solidFill>
-                <a:latin typeface="微软雅黑"/>
-                <a:ea typeface="微软雅黑"/>
-                <a:cs typeface="微软雅黑"/>
+                <a:latin typeface="微软雅黑" panose="020B0503020204020204" charset="-122"/>
+                <a:ea typeface="微软雅黑" panose="020B0503020204020204" charset="-122"/>
+                <a:cs typeface="微软雅黑" panose="020B0503020204020204" charset="-122"/>
               </a:rPr>
               <a:t>约 409 行</a:t>
             </a:r>
+            <a:endParaRPr sz="1200" b="0">
+              <a:solidFill>
+                <a:srgbClr val="444444"/>
+              </a:solidFill>
+              <a:latin typeface="微软雅黑" panose="020B0503020204020204" charset="-122"/>
+              <a:ea typeface="微软雅黑" panose="020B0503020204020204" charset="-122"/>
+              <a:cs typeface="微软雅黑" panose="020B0503020204020204" charset="-122"/>
+            </a:endParaRPr>
           </a:p>
         </p:txBody>
       </p:sp>
@@ -8892,12 +9865,20 @@
                 <a:solidFill>
                   <a:srgbClr val="1A1A1A"/>
                 </a:solidFill>
-                <a:latin typeface="微软雅黑"/>
-                <a:ea typeface="微软雅黑"/>
-                <a:cs typeface="微软雅黑"/>
+                <a:latin typeface="微软雅黑" panose="020B0503020204020204" charset="-122"/>
+                <a:ea typeface="微软雅黑" panose="020B0503020204020204" charset="-122"/>
+                <a:cs typeface="微软雅黑" panose="020B0503020204020204" charset="-122"/>
               </a:rPr>
               <a:t>系统亮点</a:t>
             </a:r>
+            <a:endParaRPr sz="1450" b="1">
+              <a:solidFill>
+                <a:srgbClr val="1A1A1A"/>
+              </a:solidFill>
+              <a:latin typeface="微软雅黑" panose="020B0503020204020204" charset="-122"/>
+              <a:ea typeface="微软雅黑" panose="020B0503020204020204" charset="-122"/>
+              <a:cs typeface="微软雅黑" panose="020B0503020204020204" charset="-122"/>
+            </a:endParaRPr>
           </a:p>
         </p:txBody>
       </p:sp>
@@ -8954,12 +9935,20 @@
                 <a:solidFill>
                   <a:srgbClr val="1F4E79"/>
                 </a:solidFill>
-                <a:latin typeface="微软雅黑"/>
-                <a:ea typeface="微软雅黑"/>
-                <a:cs typeface="微软雅黑"/>
+                <a:latin typeface="微软雅黑" panose="020B0503020204020204" charset="-122"/>
+                <a:ea typeface="微软雅黑" panose="020B0503020204020204" charset="-122"/>
+                <a:cs typeface="微软雅黑" panose="020B0503020204020204" charset="-122"/>
               </a:rPr>
               <a:t>事务保证数据一致</a:t>
             </a:r>
+            <a:endParaRPr sz="1200" b="1">
+              <a:solidFill>
+                <a:srgbClr val="1F4E79"/>
+              </a:solidFill>
+              <a:latin typeface="微软雅黑" panose="020B0503020204020204" charset="-122"/>
+              <a:ea typeface="微软雅黑" panose="020B0503020204020204" charset="-122"/>
+              <a:cs typeface="微软雅黑" panose="020B0503020204020204" charset="-122"/>
+            </a:endParaRPr>
           </a:p>
         </p:txBody>
       </p:sp>
@@ -8995,12 +9984,20 @@
                 <a:solidFill>
                   <a:srgbClr val="444444"/>
                 </a:solidFill>
-                <a:latin typeface="微软雅黑"/>
-                <a:ea typeface="微软雅黑"/>
-                <a:cs typeface="微软雅黑"/>
+                <a:latin typeface="微软雅黑" panose="020B0503020204020204" charset="-122"/>
+                <a:ea typeface="微软雅黑" panose="020B0503020204020204" charset="-122"/>
+                <a:cs typeface="微软雅黑" panose="020B0503020204020204" charset="-122"/>
               </a:rPr>
               <a:t>进货、销售的单据与库存更新在同一次事务内提交，失败自动回滚。</a:t>
             </a:r>
+            <a:endParaRPr sz="1150" b="0">
+              <a:solidFill>
+                <a:srgbClr val="444444"/>
+              </a:solidFill>
+              <a:latin typeface="微软雅黑" panose="020B0503020204020204" charset="-122"/>
+              <a:ea typeface="微软雅黑" panose="020B0503020204020204" charset="-122"/>
+              <a:cs typeface="微软雅黑" panose="020B0503020204020204" charset="-122"/>
+            </a:endParaRPr>
           </a:p>
         </p:txBody>
       </p:sp>
@@ -9036,12 +10033,20 @@
                 <a:solidFill>
                   <a:srgbClr val="1F4E79"/>
                 </a:solidFill>
-                <a:latin typeface="微软雅黑"/>
-                <a:ea typeface="微软雅黑"/>
-                <a:cs typeface="微软雅黑"/>
+                <a:latin typeface="微软雅黑" panose="020B0503020204020204" charset="-122"/>
+                <a:ea typeface="微软雅黑" panose="020B0503020204020204" charset="-122"/>
+                <a:cs typeface="微软雅黑" panose="020B0503020204020204" charset="-122"/>
               </a:rPr>
               <a:t>库存变动自动通知</a:t>
             </a:r>
+            <a:endParaRPr sz="1200" b="1">
+              <a:solidFill>
+                <a:srgbClr val="1F4E79"/>
+              </a:solidFill>
+              <a:latin typeface="微软雅黑" panose="020B0503020204020204" charset="-122"/>
+              <a:ea typeface="微软雅黑" panose="020B0503020204020204" charset="-122"/>
+              <a:cs typeface="微软雅黑" panose="020B0503020204020204" charset="-122"/>
+            </a:endParaRPr>
           </a:p>
         </p:txBody>
       </p:sp>
@@ -9077,12 +10082,20 @@
                 <a:solidFill>
                   <a:srgbClr val="444444"/>
                 </a:solidFill>
-                <a:latin typeface="微软雅黑"/>
-                <a:ea typeface="微软雅黑"/>
-                <a:cs typeface="微软雅黑"/>
+                <a:latin typeface="微软雅黑" panose="020B0503020204020204" charset="-122"/>
+                <a:ea typeface="微软雅黑" panose="020B0503020204020204" charset="-122"/>
+                <a:cs typeface="微软雅黑" panose="020B0503020204020204" charset="-122"/>
               </a:rPr>
               <a:t>库存一变就统一发出通知，各界面自行刷新，模块之间不再互相调用。</a:t>
             </a:r>
+            <a:endParaRPr sz="1150" b="0">
+              <a:solidFill>
+                <a:srgbClr val="444444"/>
+              </a:solidFill>
+              <a:latin typeface="微软雅黑" panose="020B0503020204020204" charset="-122"/>
+              <a:ea typeface="微软雅黑" panose="020B0503020204020204" charset="-122"/>
+              <a:cs typeface="微软雅黑" panose="020B0503020204020204" charset="-122"/>
+            </a:endParaRPr>
           </a:p>
         </p:txBody>
       </p:sp>
@@ -9118,12 +10131,20 @@
                 <a:solidFill>
                   <a:srgbClr val="1F4E79"/>
                 </a:solidFill>
-                <a:latin typeface="微软雅黑"/>
-                <a:ea typeface="微软雅黑"/>
-                <a:cs typeface="微软雅黑"/>
+                <a:latin typeface="微软雅黑" panose="020B0503020204020204" charset="-122"/>
+                <a:ea typeface="微软雅黑" panose="020B0503020204020204" charset="-122"/>
+                <a:cs typeface="微软雅黑" panose="020B0503020204020204" charset="-122"/>
               </a:rPr>
               <a:t>三条库存链路闭环</a:t>
             </a:r>
+            <a:endParaRPr sz="1200" b="1">
+              <a:solidFill>
+                <a:srgbClr val="1F4E79"/>
+              </a:solidFill>
+              <a:latin typeface="微软雅黑" panose="020B0503020204020204" charset="-122"/>
+              <a:ea typeface="微软雅黑" panose="020B0503020204020204" charset="-122"/>
+              <a:cs typeface="微软雅黑" panose="020B0503020204020204" charset="-122"/>
+            </a:endParaRPr>
           </a:p>
         </p:txBody>
       </p:sp>
@@ -9159,12 +10180,20 @@
                 <a:solidFill>
                   <a:srgbClr val="444444"/>
                 </a:solidFill>
-                <a:latin typeface="微软雅黑"/>
-                <a:ea typeface="微软雅黑"/>
-                <a:cs typeface="微软雅黑"/>
+                <a:latin typeface="微软雅黑" panose="020B0503020204020204" charset="-122"/>
+                <a:ea typeface="微软雅黑" panose="020B0503020204020204" charset="-122"/>
+                <a:cs typeface="微软雅黑" panose="020B0503020204020204" charset="-122"/>
               </a:rPr>
               <a:t>进货自动加库存、销售自动减库存、盘点校正库存。</a:t>
             </a:r>
+            <a:endParaRPr sz="1150" b="0">
+              <a:solidFill>
+                <a:srgbClr val="444444"/>
+              </a:solidFill>
+              <a:latin typeface="微软雅黑" panose="020B0503020204020204" charset="-122"/>
+              <a:ea typeface="微软雅黑" panose="020B0503020204020204" charset="-122"/>
+              <a:cs typeface="微软雅黑" panose="020B0503020204020204" charset="-122"/>
+            </a:endParaRPr>
           </a:p>
         </p:txBody>
       </p:sp>
@@ -9200,12 +10229,20 @@
                 <a:solidFill>
                   <a:srgbClr val="1F4E79"/>
                 </a:solidFill>
-                <a:latin typeface="微软雅黑"/>
-                <a:ea typeface="微软雅黑"/>
-                <a:cs typeface="微软雅黑"/>
+                <a:latin typeface="微软雅黑" panose="020B0503020204020204" charset="-122"/>
+                <a:ea typeface="微软雅黑" panose="020B0503020204020204" charset="-122"/>
+                <a:cs typeface="微软雅黑" panose="020B0503020204020204" charset="-122"/>
               </a:rPr>
               <a:t>数据一键备份恢复</a:t>
             </a:r>
+            <a:endParaRPr sz="1200" b="1">
+              <a:solidFill>
+                <a:srgbClr val="1F4E79"/>
+              </a:solidFill>
+              <a:latin typeface="微软雅黑" panose="020B0503020204020204" charset="-122"/>
+              <a:ea typeface="微软雅黑" panose="020B0503020204020204" charset="-122"/>
+              <a:cs typeface="微软雅黑" panose="020B0503020204020204" charset="-122"/>
+            </a:endParaRPr>
           </a:p>
         </p:txBody>
       </p:sp>
@@ -9241,12 +10278,20 @@
                 <a:solidFill>
                   <a:srgbClr val="444444"/>
                 </a:solidFill>
-                <a:latin typeface="微软雅黑"/>
-                <a:ea typeface="微软雅黑"/>
-                <a:cs typeface="微软雅黑"/>
+                <a:latin typeface="微软雅黑" panose="020B0503020204020204" charset="-122"/>
+                <a:ea typeface="微软雅黑" panose="020B0503020204020204" charset="-122"/>
+                <a:cs typeface="微软雅黑" panose="020B0503020204020204" charset="-122"/>
               </a:rPr>
               <a:t>另开线程执行并显示进度，备份时界面不卡顿。</a:t>
             </a:r>
+            <a:endParaRPr sz="1150" b="0">
+              <a:solidFill>
+                <a:srgbClr val="444444"/>
+              </a:solidFill>
+              <a:latin typeface="微软雅黑" panose="020B0503020204020204" charset="-122"/>
+              <a:ea typeface="微软雅黑" panose="020B0503020204020204" charset="-122"/>
+              <a:cs typeface="微软雅黑" panose="020B0503020204020204" charset="-122"/>
+            </a:endParaRPr>
           </a:p>
         </p:txBody>
       </p:sp>
@@ -9574,6 +10619,10 @@
       </a:style>
     </a:lnDef>
   </a:objectDefaults>
-  <a:extraClrSchemeLst/>
+  <a:extLst>
+    <a:ext uri="{05A4C25C-085E-4340-85A3-A5531E510DB2}">
+      <thm15:themeFamily xmlns:thm15="http://schemas.microsoft.com/office/thememl/2012/main" name="Office Theme" id="{62F939B6-93AF-4DB8-9C6B-D6C7DFDC589F}" vid="{4A3C46E8-61CC-4603-A589-7422A47A8E4A}"/>
+    </a:ext>
+  </a:extLst>
 </a:theme>
 </file>